--- a/gakkyu/tegami/pptx/Y4.pptx
+++ b/gakkyu/tegami/pptx/Y4.pptx
@@ -3568,44 +3568,9 @@
           </a:p>
         </p:txBody>
       </p:sp>
-      <p:sp>
-        <p:nvSpPr>
-          <p:cNvPr id="3" name="名前欄"/>
-          <p:cNvSpPr txBox="1"/>
-          <p:nvPr/>
-        </p:nvSpPr>
-        <p:spPr>
-          <a:xfrm>
-            <a:off x="3600000" y="475200"/>
-            <a:ext cx="3420000" cy="252000"/>
-          </a:xfrm>
-          <a:prstGeom prst="rect">
-            <a:avLst/>
-          </a:prstGeom>
-          <a:noFill/>
-        </p:spPr>
-        <p:txBody>
-          <a:bodyPr wrap="square" lIns="0" rIns="0" tIns="0" bIns="0" anchor="t">
-            <a:spAutoFit/>
-          </a:bodyPr>
-          <a:lstStyle/>
-          <a:p>
-            <a:pPr algn="r"/>
-            <a:r>
-              <a:rPr sz="1000" b="0">
-                <a:solidFill>
-                  <a:srgbClr val="38424B"/>
-                </a:solidFill>
-                <a:latin typeface="UD デジタル 教科書体 N-R"/>
-              </a:rPr>
-              <a:t>（　　年　　組　　名前　　　　　　　　）</a:t>
-            </a:r>
-          </a:p>
-        </p:txBody>
-      </p:sp>
       <p:cxnSp>
         <p:nvCxnSpPr>
-          <p:cNvPr id="4" name="見出しの線"/>
+          <p:cNvPr id="3" name="見出しの線"/>
           <p:cNvCxnSpPr/>
           <p:nvPr/>
         </p:nvCxnSpPr>
@@ -3641,7 +3606,7 @@
       </p:cxnSp>
       <p:grpSp>
         <p:nvGrpSpPr>
-          <p:cNvPr id="5" name="1行目"/>
+          <p:cNvPr id="4" name="1行目"/>
           <p:cNvGrpSpPr/>
           <p:nvPr/>
         </p:nvGrpSpPr>
@@ -3655,7 +3620,7 @@
         </p:grpSpPr>
         <p:sp>
           <p:nvSpPr>
-            <p:cNvPr id="6" name="外わく"/>
+            <p:cNvPr id="5" name="外わく"/>
             <p:cNvSpPr/>
             <p:nvPr/>
           </p:nvSpPr>
@@ -3699,7 +3664,7 @@
         </p:sp>
         <p:cxnSp>
           <p:nvCxnSpPr>
-            <p:cNvPr id="7" name="マスの線 1"/>
+            <p:cNvPr id="6" name="マスの線 1"/>
             <p:cNvCxnSpPr/>
             <p:nvPr/>
           </p:nvCxnSpPr>
@@ -3735,7 +3700,7 @@
         </p:cxnSp>
         <p:cxnSp>
           <p:nvCxnSpPr>
-            <p:cNvPr id="8" name="マスの線 2"/>
+            <p:cNvPr id="7" name="マスの線 2"/>
             <p:cNvCxnSpPr/>
             <p:nvPr/>
           </p:nvCxnSpPr>
@@ -3771,7 +3736,7 @@
         </p:cxnSp>
         <p:cxnSp>
           <p:nvCxnSpPr>
-            <p:cNvPr id="9" name="マスの線 3"/>
+            <p:cNvPr id="8" name="マスの線 3"/>
             <p:cNvCxnSpPr/>
             <p:nvPr/>
           </p:nvCxnSpPr>
@@ -3807,7 +3772,7 @@
         </p:cxnSp>
         <p:cxnSp>
           <p:nvCxnSpPr>
-            <p:cNvPr id="10" name="マスの線 4"/>
+            <p:cNvPr id="9" name="マスの線 4"/>
             <p:cNvCxnSpPr/>
             <p:nvPr/>
           </p:nvCxnSpPr>
@@ -3843,7 +3808,7 @@
         </p:cxnSp>
         <p:cxnSp>
           <p:nvCxnSpPr>
-            <p:cNvPr id="11" name="マスの線 5"/>
+            <p:cNvPr id="10" name="マスの線 5"/>
             <p:cNvCxnSpPr/>
             <p:nvPr/>
           </p:nvCxnSpPr>
@@ -3879,7 +3844,7 @@
         </p:cxnSp>
         <p:cxnSp>
           <p:nvCxnSpPr>
-            <p:cNvPr id="12" name="マスの線 6"/>
+            <p:cNvPr id="11" name="マスの線 6"/>
             <p:cNvCxnSpPr/>
             <p:nvPr/>
           </p:nvCxnSpPr>
@@ -3915,7 +3880,7 @@
         </p:cxnSp>
         <p:cxnSp>
           <p:nvCxnSpPr>
-            <p:cNvPr id="13" name="マスの線 7"/>
+            <p:cNvPr id="12" name="マスの線 7"/>
             <p:cNvCxnSpPr/>
             <p:nvPr/>
           </p:nvCxnSpPr>
@@ -3951,7 +3916,7 @@
         </p:cxnSp>
         <p:cxnSp>
           <p:nvCxnSpPr>
-            <p:cNvPr id="14" name="マスの線 8"/>
+            <p:cNvPr id="13" name="マスの線 8"/>
             <p:cNvCxnSpPr/>
             <p:nvPr/>
           </p:nvCxnSpPr>
@@ -3987,7 +3952,7 @@
         </p:cxnSp>
         <p:cxnSp>
           <p:nvCxnSpPr>
-            <p:cNvPr id="15" name="マスの線 9"/>
+            <p:cNvPr id="14" name="マスの線 9"/>
             <p:cNvCxnSpPr/>
             <p:nvPr/>
           </p:nvCxnSpPr>
@@ -4023,7 +3988,7 @@
         </p:cxnSp>
         <p:cxnSp>
           <p:nvCxnSpPr>
-            <p:cNvPr id="16" name="マスの線 10"/>
+            <p:cNvPr id="15" name="マスの線 10"/>
             <p:cNvCxnSpPr/>
             <p:nvPr/>
           </p:nvCxnSpPr>
@@ -4059,7 +4024,7 @@
         </p:cxnSp>
         <p:cxnSp>
           <p:nvCxnSpPr>
-            <p:cNvPr id="17" name="マスの線 11"/>
+            <p:cNvPr id="16" name="マスの線 11"/>
             <p:cNvCxnSpPr/>
             <p:nvPr/>
           </p:nvCxnSpPr>
@@ -4095,7 +4060,7 @@
         </p:cxnSp>
         <p:cxnSp>
           <p:nvCxnSpPr>
-            <p:cNvPr id="18" name="マスの線 12"/>
+            <p:cNvPr id="17" name="マスの線 12"/>
             <p:cNvCxnSpPr/>
             <p:nvPr/>
           </p:nvCxnSpPr>
@@ -4131,7 +4096,7 @@
         </p:cxnSp>
         <p:cxnSp>
           <p:nvCxnSpPr>
-            <p:cNvPr id="19" name="マスの線 13"/>
+            <p:cNvPr id="18" name="マスの線 13"/>
             <p:cNvCxnSpPr/>
             <p:nvPr/>
           </p:nvCxnSpPr>
@@ -4167,7 +4132,7 @@
         </p:cxnSp>
         <p:cxnSp>
           <p:nvCxnSpPr>
-            <p:cNvPr id="20" name="マスの線 14"/>
+            <p:cNvPr id="19" name="マスの線 14"/>
             <p:cNvCxnSpPr/>
             <p:nvPr/>
           </p:nvCxnSpPr>
@@ -4203,7 +4168,7 @@
         </p:cxnSp>
         <p:cxnSp>
           <p:nvCxnSpPr>
-            <p:cNvPr id="21" name="マスの線 15"/>
+            <p:cNvPr id="20" name="マスの線 15"/>
             <p:cNvCxnSpPr/>
             <p:nvPr/>
           </p:nvCxnSpPr>
@@ -4239,7 +4204,7 @@
         </p:cxnSp>
         <p:cxnSp>
           <p:nvCxnSpPr>
-            <p:cNvPr id="22" name="マスの線 16"/>
+            <p:cNvPr id="21" name="マスの線 16"/>
             <p:cNvCxnSpPr/>
             <p:nvPr/>
           </p:nvCxnSpPr>
@@ -4275,7 +4240,7 @@
         </p:cxnSp>
         <p:cxnSp>
           <p:nvCxnSpPr>
-            <p:cNvPr id="23" name="マスの線 17"/>
+            <p:cNvPr id="22" name="マスの線 17"/>
             <p:cNvCxnSpPr/>
             <p:nvPr/>
           </p:nvCxnSpPr>
@@ -4311,7 +4276,7 @@
         </p:cxnSp>
         <p:cxnSp>
           <p:nvCxnSpPr>
-            <p:cNvPr id="24" name="マスの線 18"/>
+            <p:cNvPr id="23" name="マスの線 18"/>
             <p:cNvCxnSpPr/>
             <p:nvPr/>
           </p:nvCxnSpPr>
@@ -4347,7 +4312,7 @@
         </p:cxnSp>
         <p:cxnSp>
           <p:nvCxnSpPr>
-            <p:cNvPr id="25" name="マスの線 19"/>
+            <p:cNvPr id="24" name="マスの線 19"/>
             <p:cNvCxnSpPr/>
             <p:nvPr/>
           </p:nvCxnSpPr>
@@ -4383,7 +4348,7 @@
         </p:cxnSp>
         <p:cxnSp>
           <p:nvCxnSpPr>
-            <p:cNvPr id="26" name="マスの線 20"/>
+            <p:cNvPr id="25" name="マスの線 20"/>
             <p:cNvCxnSpPr/>
             <p:nvPr/>
           </p:nvCxnSpPr>
@@ -4419,7 +4384,7 @@
         </p:cxnSp>
         <p:cxnSp>
           <p:nvCxnSpPr>
-            <p:cNvPr id="27" name="マスの線 21"/>
+            <p:cNvPr id="26" name="マスの線 21"/>
             <p:cNvCxnSpPr/>
             <p:nvPr/>
           </p:nvCxnSpPr>
@@ -4456,7 +4421,7 @@
       </p:grpSp>
       <p:grpSp>
         <p:nvGrpSpPr>
-          <p:cNvPr id="28" name="2行目"/>
+          <p:cNvPr id="27" name="2行目"/>
           <p:cNvGrpSpPr/>
           <p:nvPr/>
         </p:nvGrpSpPr>
@@ -4470,7 +4435,7 @@
         </p:grpSpPr>
         <p:sp>
           <p:nvSpPr>
-            <p:cNvPr id="29" name="外わく"/>
+            <p:cNvPr id="28" name="外わく"/>
             <p:cNvSpPr/>
             <p:nvPr/>
           </p:nvSpPr>
@@ -4514,7 +4479,7 @@
         </p:sp>
         <p:cxnSp>
           <p:nvCxnSpPr>
-            <p:cNvPr id="30" name="マスの線 1"/>
+            <p:cNvPr id="29" name="マスの線 1"/>
             <p:cNvCxnSpPr/>
             <p:nvPr/>
           </p:nvCxnSpPr>
@@ -4550,7 +4515,7 @@
         </p:cxnSp>
         <p:cxnSp>
           <p:nvCxnSpPr>
-            <p:cNvPr id="31" name="マスの線 2"/>
+            <p:cNvPr id="30" name="マスの線 2"/>
             <p:cNvCxnSpPr/>
             <p:nvPr/>
           </p:nvCxnSpPr>
@@ -4586,7 +4551,7 @@
         </p:cxnSp>
         <p:cxnSp>
           <p:nvCxnSpPr>
-            <p:cNvPr id="32" name="マスの線 3"/>
+            <p:cNvPr id="31" name="マスの線 3"/>
             <p:cNvCxnSpPr/>
             <p:nvPr/>
           </p:nvCxnSpPr>
@@ -4622,7 +4587,7 @@
         </p:cxnSp>
         <p:cxnSp>
           <p:nvCxnSpPr>
-            <p:cNvPr id="33" name="マスの線 4"/>
+            <p:cNvPr id="32" name="マスの線 4"/>
             <p:cNvCxnSpPr/>
             <p:nvPr/>
           </p:nvCxnSpPr>
@@ -4658,7 +4623,7 @@
         </p:cxnSp>
         <p:cxnSp>
           <p:nvCxnSpPr>
-            <p:cNvPr id="34" name="マスの線 5"/>
+            <p:cNvPr id="33" name="マスの線 5"/>
             <p:cNvCxnSpPr/>
             <p:nvPr/>
           </p:nvCxnSpPr>
@@ -4694,7 +4659,7 @@
         </p:cxnSp>
         <p:cxnSp>
           <p:nvCxnSpPr>
-            <p:cNvPr id="35" name="マスの線 6"/>
+            <p:cNvPr id="34" name="マスの線 6"/>
             <p:cNvCxnSpPr/>
             <p:nvPr/>
           </p:nvCxnSpPr>
@@ -4730,7 +4695,7 @@
         </p:cxnSp>
         <p:cxnSp>
           <p:nvCxnSpPr>
-            <p:cNvPr id="36" name="マスの線 7"/>
+            <p:cNvPr id="35" name="マスの線 7"/>
             <p:cNvCxnSpPr/>
             <p:nvPr/>
           </p:nvCxnSpPr>
@@ -4766,7 +4731,7 @@
         </p:cxnSp>
         <p:cxnSp>
           <p:nvCxnSpPr>
-            <p:cNvPr id="37" name="マスの線 8"/>
+            <p:cNvPr id="36" name="マスの線 8"/>
             <p:cNvCxnSpPr/>
             <p:nvPr/>
           </p:nvCxnSpPr>
@@ -4802,7 +4767,7 @@
         </p:cxnSp>
         <p:cxnSp>
           <p:nvCxnSpPr>
-            <p:cNvPr id="38" name="マスの線 9"/>
+            <p:cNvPr id="37" name="マスの線 9"/>
             <p:cNvCxnSpPr/>
             <p:nvPr/>
           </p:nvCxnSpPr>
@@ -4838,7 +4803,7 @@
         </p:cxnSp>
         <p:cxnSp>
           <p:nvCxnSpPr>
-            <p:cNvPr id="39" name="マスの線 10"/>
+            <p:cNvPr id="38" name="マスの線 10"/>
             <p:cNvCxnSpPr/>
             <p:nvPr/>
           </p:nvCxnSpPr>
@@ -4874,7 +4839,7 @@
         </p:cxnSp>
         <p:cxnSp>
           <p:nvCxnSpPr>
-            <p:cNvPr id="40" name="マスの線 11"/>
+            <p:cNvPr id="39" name="マスの線 11"/>
             <p:cNvCxnSpPr/>
             <p:nvPr/>
           </p:nvCxnSpPr>
@@ -4910,7 +4875,7 @@
         </p:cxnSp>
         <p:cxnSp>
           <p:nvCxnSpPr>
-            <p:cNvPr id="41" name="マスの線 12"/>
+            <p:cNvPr id="40" name="マスの線 12"/>
             <p:cNvCxnSpPr/>
             <p:nvPr/>
           </p:nvCxnSpPr>
@@ -4946,7 +4911,7 @@
         </p:cxnSp>
         <p:cxnSp>
           <p:nvCxnSpPr>
-            <p:cNvPr id="42" name="マスの線 13"/>
+            <p:cNvPr id="41" name="マスの線 13"/>
             <p:cNvCxnSpPr/>
             <p:nvPr/>
           </p:nvCxnSpPr>
@@ -4982,7 +4947,7 @@
         </p:cxnSp>
         <p:cxnSp>
           <p:nvCxnSpPr>
-            <p:cNvPr id="43" name="マスの線 14"/>
+            <p:cNvPr id="42" name="マスの線 14"/>
             <p:cNvCxnSpPr/>
             <p:nvPr/>
           </p:nvCxnSpPr>
@@ -5018,7 +4983,7 @@
         </p:cxnSp>
         <p:cxnSp>
           <p:nvCxnSpPr>
-            <p:cNvPr id="44" name="マスの線 15"/>
+            <p:cNvPr id="43" name="マスの線 15"/>
             <p:cNvCxnSpPr/>
             <p:nvPr/>
           </p:nvCxnSpPr>
@@ -5054,7 +5019,7 @@
         </p:cxnSp>
         <p:cxnSp>
           <p:nvCxnSpPr>
-            <p:cNvPr id="45" name="マスの線 16"/>
+            <p:cNvPr id="44" name="マスの線 16"/>
             <p:cNvCxnSpPr/>
             <p:nvPr/>
           </p:nvCxnSpPr>
@@ -5090,7 +5055,7 @@
         </p:cxnSp>
         <p:cxnSp>
           <p:nvCxnSpPr>
-            <p:cNvPr id="46" name="マスの線 17"/>
+            <p:cNvPr id="45" name="マスの線 17"/>
             <p:cNvCxnSpPr/>
             <p:nvPr/>
           </p:nvCxnSpPr>
@@ -5126,7 +5091,7 @@
         </p:cxnSp>
         <p:cxnSp>
           <p:nvCxnSpPr>
-            <p:cNvPr id="47" name="マスの線 18"/>
+            <p:cNvPr id="46" name="マスの線 18"/>
             <p:cNvCxnSpPr/>
             <p:nvPr/>
           </p:nvCxnSpPr>
@@ -5162,7 +5127,7 @@
         </p:cxnSp>
         <p:cxnSp>
           <p:nvCxnSpPr>
-            <p:cNvPr id="48" name="マスの線 19"/>
+            <p:cNvPr id="47" name="マスの線 19"/>
             <p:cNvCxnSpPr/>
             <p:nvPr/>
           </p:nvCxnSpPr>
@@ -5198,7 +5163,7 @@
         </p:cxnSp>
         <p:cxnSp>
           <p:nvCxnSpPr>
-            <p:cNvPr id="49" name="マスの線 20"/>
+            <p:cNvPr id="48" name="マスの線 20"/>
             <p:cNvCxnSpPr/>
             <p:nvPr/>
           </p:nvCxnSpPr>
@@ -5234,7 +5199,7 @@
         </p:cxnSp>
         <p:cxnSp>
           <p:nvCxnSpPr>
-            <p:cNvPr id="50" name="マスの線 21"/>
+            <p:cNvPr id="49" name="マスの線 21"/>
             <p:cNvCxnSpPr/>
             <p:nvPr/>
           </p:nvCxnSpPr>
@@ -5271,7 +5236,7 @@
       </p:grpSp>
       <p:grpSp>
         <p:nvGrpSpPr>
-          <p:cNvPr id="51" name="3行目"/>
+          <p:cNvPr id="50" name="3行目"/>
           <p:cNvGrpSpPr/>
           <p:nvPr/>
         </p:nvGrpSpPr>
@@ -5285,7 +5250,7 @@
         </p:grpSpPr>
         <p:sp>
           <p:nvSpPr>
-            <p:cNvPr id="52" name="外わく"/>
+            <p:cNvPr id="51" name="外わく"/>
             <p:cNvSpPr/>
             <p:nvPr/>
           </p:nvSpPr>
@@ -5329,7 +5294,7 @@
         </p:sp>
         <p:cxnSp>
           <p:nvCxnSpPr>
-            <p:cNvPr id="53" name="マスの線 1"/>
+            <p:cNvPr id="52" name="マスの線 1"/>
             <p:cNvCxnSpPr/>
             <p:nvPr/>
           </p:nvCxnSpPr>
@@ -5365,7 +5330,7 @@
         </p:cxnSp>
         <p:cxnSp>
           <p:nvCxnSpPr>
-            <p:cNvPr id="54" name="マスの線 2"/>
+            <p:cNvPr id="53" name="マスの線 2"/>
             <p:cNvCxnSpPr/>
             <p:nvPr/>
           </p:nvCxnSpPr>
@@ -5401,7 +5366,7 @@
         </p:cxnSp>
         <p:cxnSp>
           <p:nvCxnSpPr>
-            <p:cNvPr id="55" name="マスの線 3"/>
+            <p:cNvPr id="54" name="マスの線 3"/>
             <p:cNvCxnSpPr/>
             <p:nvPr/>
           </p:nvCxnSpPr>
@@ -5437,7 +5402,7 @@
         </p:cxnSp>
         <p:cxnSp>
           <p:nvCxnSpPr>
-            <p:cNvPr id="56" name="マスの線 4"/>
+            <p:cNvPr id="55" name="マスの線 4"/>
             <p:cNvCxnSpPr/>
             <p:nvPr/>
           </p:nvCxnSpPr>
@@ -5473,7 +5438,7 @@
         </p:cxnSp>
         <p:cxnSp>
           <p:nvCxnSpPr>
-            <p:cNvPr id="57" name="マスの線 5"/>
+            <p:cNvPr id="56" name="マスの線 5"/>
             <p:cNvCxnSpPr/>
             <p:nvPr/>
           </p:nvCxnSpPr>
@@ -5509,7 +5474,7 @@
         </p:cxnSp>
         <p:cxnSp>
           <p:nvCxnSpPr>
-            <p:cNvPr id="58" name="マスの線 6"/>
+            <p:cNvPr id="57" name="マスの線 6"/>
             <p:cNvCxnSpPr/>
             <p:nvPr/>
           </p:nvCxnSpPr>
@@ -5545,7 +5510,7 @@
         </p:cxnSp>
         <p:cxnSp>
           <p:nvCxnSpPr>
-            <p:cNvPr id="59" name="マスの線 7"/>
+            <p:cNvPr id="58" name="マスの線 7"/>
             <p:cNvCxnSpPr/>
             <p:nvPr/>
           </p:nvCxnSpPr>
@@ -5581,7 +5546,7 @@
         </p:cxnSp>
         <p:cxnSp>
           <p:nvCxnSpPr>
-            <p:cNvPr id="60" name="マスの線 8"/>
+            <p:cNvPr id="59" name="マスの線 8"/>
             <p:cNvCxnSpPr/>
             <p:nvPr/>
           </p:nvCxnSpPr>
@@ -5617,7 +5582,7 @@
         </p:cxnSp>
         <p:cxnSp>
           <p:nvCxnSpPr>
-            <p:cNvPr id="61" name="マスの線 9"/>
+            <p:cNvPr id="60" name="マスの線 9"/>
             <p:cNvCxnSpPr/>
             <p:nvPr/>
           </p:nvCxnSpPr>
@@ -5653,7 +5618,7 @@
         </p:cxnSp>
         <p:cxnSp>
           <p:nvCxnSpPr>
-            <p:cNvPr id="62" name="マスの線 10"/>
+            <p:cNvPr id="61" name="マスの線 10"/>
             <p:cNvCxnSpPr/>
             <p:nvPr/>
           </p:nvCxnSpPr>
@@ -5689,7 +5654,7 @@
         </p:cxnSp>
         <p:cxnSp>
           <p:nvCxnSpPr>
-            <p:cNvPr id="63" name="マスの線 11"/>
+            <p:cNvPr id="62" name="マスの線 11"/>
             <p:cNvCxnSpPr/>
             <p:nvPr/>
           </p:nvCxnSpPr>
@@ -5725,7 +5690,7 @@
         </p:cxnSp>
         <p:cxnSp>
           <p:nvCxnSpPr>
-            <p:cNvPr id="64" name="マスの線 12"/>
+            <p:cNvPr id="63" name="マスの線 12"/>
             <p:cNvCxnSpPr/>
             <p:nvPr/>
           </p:nvCxnSpPr>
@@ -5761,7 +5726,7 @@
         </p:cxnSp>
         <p:cxnSp>
           <p:nvCxnSpPr>
-            <p:cNvPr id="65" name="マスの線 13"/>
+            <p:cNvPr id="64" name="マスの線 13"/>
             <p:cNvCxnSpPr/>
             <p:nvPr/>
           </p:nvCxnSpPr>
@@ -5797,7 +5762,7 @@
         </p:cxnSp>
         <p:cxnSp>
           <p:nvCxnSpPr>
-            <p:cNvPr id="66" name="マスの線 14"/>
+            <p:cNvPr id="65" name="マスの線 14"/>
             <p:cNvCxnSpPr/>
             <p:nvPr/>
           </p:nvCxnSpPr>
@@ -5833,7 +5798,7 @@
         </p:cxnSp>
         <p:cxnSp>
           <p:nvCxnSpPr>
-            <p:cNvPr id="67" name="マスの線 15"/>
+            <p:cNvPr id="66" name="マスの線 15"/>
             <p:cNvCxnSpPr/>
             <p:nvPr/>
           </p:nvCxnSpPr>
@@ -5869,7 +5834,7 @@
         </p:cxnSp>
         <p:cxnSp>
           <p:nvCxnSpPr>
-            <p:cNvPr id="68" name="マスの線 16"/>
+            <p:cNvPr id="67" name="マスの線 16"/>
             <p:cNvCxnSpPr/>
             <p:nvPr/>
           </p:nvCxnSpPr>
@@ -5905,7 +5870,7 @@
         </p:cxnSp>
         <p:cxnSp>
           <p:nvCxnSpPr>
-            <p:cNvPr id="69" name="マスの線 17"/>
+            <p:cNvPr id="68" name="マスの線 17"/>
             <p:cNvCxnSpPr/>
             <p:nvPr/>
           </p:nvCxnSpPr>
@@ -5941,7 +5906,7 @@
         </p:cxnSp>
         <p:cxnSp>
           <p:nvCxnSpPr>
-            <p:cNvPr id="70" name="マスの線 18"/>
+            <p:cNvPr id="69" name="マスの線 18"/>
             <p:cNvCxnSpPr/>
             <p:nvPr/>
           </p:nvCxnSpPr>
@@ -5977,7 +5942,7 @@
         </p:cxnSp>
         <p:cxnSp>
           <p:nvCxnSpPr>
-            <p:cNvPr id="71" name="マスの線 19"/>
+            <p:cNvPr id="70" name="マスの線 19"/>
             <p:cNvCxnSpPr/>
             <p:nvPr/>
           </p:nvCxnSpPr>
@@ -6013,7 +5978,7 @@
         </p:cxnSp>
         <p:cxnSp>
           <p:nvCxnSpPr>
-            <p:cNvPr id="72" name="マスの線 20"/>
+            <p:cNvPr id="71" name="マスの線 20"/>
             <p:cNvCxnSpPr/>
             <p:nvPr/>
           </p:nvCxnSpPr>
@@ -6049,7 +6014,7 @@
         </p:cxnSp>
         <p:cxnSp>
           <p:nvCxnSpPr>
-            <p:cNvPr id="73" name="マスの線 21"/>
+            <p:cNvPr id="72" name="マスの線 21"/>
             <p:cNvCxnSpPr/>
             <p:nvPr/>
           </p:nvCxnSpPr>
@@ -6086,7 +6051,7 @@
       </p:grpSp>
       <p:grpSp>
         <p:nvGrpSpPr>
-          <p:cNvPr id="74" name="4行目"/>
+          <p:cNvPr id="73" name="4行目"/>
           <p:cNvGrpSpPr/>
           <p:nvPr/>
         </p:nvGrpSpPr>
@@ -6100,7 +6065,7 @@
         </p:grpSpPr>
         <p:sp>
           <p:nvSpPr>
-            <p:cNvPr id="75" name="外わく"/>
+            <p:cNvPr id="74" name="外わく"/>
             <p:cNvSpPr/>
             <p:nvPr/>
           </p:nvSpPr>
@@ -6144,7 +6109,7 @@
         </p:sp>
         <p:cxnSp>
           <p:nvCxnSpPr>
-            <p:cNvPr id="76" name="マスの線 1"/>
+            <p:cNvPr id="75" name="マスの線 1"/>
             <p:cNvCxnSpPr/>
             <p:nvPr/>
           </p:nvCxnSpPr>
@@ -6180,7 +6145,7 @@
         </p:cxnSp>
         <p:cxnSp>
           <p:nvCxnSpPr>
-            <p:cNvPr id="77" name="マスの線 2"/>
+            <p:cNvPr id="76" name="マスの線 2"/>
             <p:cNvCxnSpPr/>
             <p:nvPr/>
           </p:nvCxnSpPr>
@@ -6216,7 +6181,7 @@
         </p:cxnSp>
         <p:cxnSp>
           <p:nvCxnSpPr>
-            <p:cNvPr id="78" name="マスの線 3"/>
+            <p:cNvPr id="77" name="マスの線 3"/>
             <p:cNvCxnSpPr/>
             <p:nvPr/>
           </p:nvCxnSpPr>
@@ -6252,7 +6217,7 @@
         </p:cxnSp>
         <p:cxnSp>
           <p:nvCxnSpPr>
-            <p:cNvPr id="79" name="マスの線 4"/>
+            <p:cNvPr id="78" name="マスの線 4"/>
             <p:cNvCxnSpPr/>
             <p:nvPr/>
           </p:nvCxnSpPr>
@@ -6288,7 +6253,7 @@
         </p:cxnSp>
         <p:cxnSp>
           <p:nvCxnSpPr>
-            <p:cNvPr id="80" name="マスの線 5"/>
+            <p:cNvPr id="79" name="マスの線 5"/>
             <p:cNvCxnSpPr/>
             <p:nvPr/>
           </p:nvCxnSpPr>
@@ -6324,7 +6289,7 @@
         </p:cxnSp>
         <p:cxnSp>
           <p:nvCxnSpPr>
-            <p:cNvPr id="81" name="マスの線 6"/>
+            <p:cNvPr id="80" name="マスの線 6"/>
             <p:cNvCxnSpPr/>
             <p:nvPr/>
           </p:nvCxnSpPr>
@@ -6360,7 +6325,7 @@
         </p:cxnSp>
         <p:cxnSp>
           <p:nvCxnSpPr>
-            <p:cNvPr id="82" name="マスの線 7"/>
+            <p:cNvPr id="81" name="マスの線 7"/>
             <p:cNvCxnSpPr/>
             <p:nvPr/>
           </p:nvCxnSpPr>
@@ -6396,7 +6361,7 @@
         </p:cxnSp>
         <p:cxnSp>
           <p:nvCxnSpPr>
-            <p:cNvPr id="83" name="マスの線 8"/>
+            <p:cNvPr id="82" name="マスの線 8"/>
             <p:cNvCxnSpPr/>
             <p:nvPr/>
           </p:nvCxnSpPr>
@@ -6432,7 +6397,7 @@
         </p:cxnSp>
         <p:cxnSp>
           <p:nvCxnSpPr>
-            <p:cNvPr id="84" name="マスの線 9"/>
+            <p:cNvPr id="83" name="マスの線 9"/>
             <p:cNvCxnSpPr/>
             <p:nvPr/>
           </p:nvCxnSpPr>
@@ -6468,7 +6433,7 @@
         </p:cxnSp>
         <p:cxnSp>
           <p:nvCxnSpPr>
-            <p:cNvPr id="85" name="マスの線 10"/>
+            <p:cNvPr id="84" name="マスの線 10"/>
             <p:cNvCxnSpPr/>
             <p:nvPr/>
           </p:nvCxnSpPr>
@@ -6504,7 +6469,7 @@
         </p:cxnSp>
         <p:cxnSp>
           <p:nvCxnSpPr>
-            <p:cNvPr id="86" name="マスの線 11"/>
+            <p:cNvPr id="85" name="マスの線 11"/>
             <p:cNvCxnSpPr/>
             <p:nvPr/>
           </p:nvCxnSpPr>
@@ -6540,7 +6505,7 @@
         </p:cxnSp>
         <p:cxnSp>
           <p:nvCxnSpPr>
-            <p:cNvPr id="87" name="マスの線 12"/>
+            <p:cNvPr id="86" name="マスの線 12"/>
             <p:cNvCxnSpPr/>
             <p:nvPr/>
           </p:nvCxnSpPr>
@@ -6576,7 +6541,7 @@
         </p:cxnSp>
         <p:cxnSp>
           <p:nvCxnSpPr>
-            <p:cNvPr id="88" name="マスの線 13"/>
+            <p:cNvPr id="87" name="マスの線 13"/>
             <p:cNvCxnSpPr/>
             <p:nvPr/>
           </p:nvCxnSpPr>
@@ -6612,7 +6577,7 @@
         </p:cxnSp>
         <p:cxnSp>
           <p:nvCxnSpPr>
-            <p:cNvPr id="89" name="マスの線 14"/>
+            <p:cNvPr id="88" name="マスの線 14"/>
             <p:cNvCxnSpPr/>
             <p:nvPr/>
           </p:nvCxnSpPr>
@@ -6648,7 +6613,7 @@
         </p:cxnSp>
         <p:cxnSp>
           <p:nvCxnSpPr>
-            <p:cNvPr id="90" name="マスの線 15"/>
+            <p:cNvPr id="89" name="マスの線 15"/>
             <p:cNvCxnSpPr/>
             <p:nvPr/>
           </p:nvCxnSpPr>
@@ -6684,7 +6649,7 @@
         </p:cxnSp>
         <p:cxnSp>
           <p:nvCxnSpPr>
-            <p:cNvPr id="91" name="マスの線 16"/>
+            <p:cNvPr id="90" name="マスの線 16"/>
             <p:cNvCxnSpPr/>
             <p:nvPr/>
           </p:nvCxnSpPr>
@@ -6720,7 +6685,7 @@
         </p:cxnSp>
         <p:cxnSp>
           <p:nvCxnSpPr>
-            <p:cNvPr id="92" name="マスの線 17"/>
+            <p:cNvPr id="91" name="マスの線 17"/>
             <p:cNvCxnSpPr/>
             <p:nvPr/>
           </p:nvCxnSpPr>
@@ -6756,7 +6721,7 @@
         </p:cxnSp>
         <p:cxnSp>
           <p:nvCxnSpPr>
-            <p:cNvPr id="93" name="マスの線 18"/>
+            <p:cNvPr id="92" name="マスの線 18"/>
             <p:cNvCxnSpPr/>
             <p:nvPr/>
           </p:nvCxnSpPr>
@@ -6792,7 +6757,7 @@
         </p:cxnSp>
         <p:cxnSp>
           <p:nvCxnSpPr>
-            <p:cNvPr id="94" name="マスの線 19"/>
+            <p:cNvPr id="93" name="マスの線 19"/>
             <p:cNvCxnSpPr/>
             <p:nvPr/>
           </p:nvCxnSpPr>
@@ -6828,7 +6793,7 @@
         </p:cxnSp>
         <p:cxnSp>
           <p:nvCxnSpPr>
-            <p:cNvPr id="95" name="マスの線 20"/>
+            <p:cNvPr id="94" name="マスの線 20"/>
             <p:cNvCxnSpPr/>
             <p:nvPr/>
           </p:nvCxnSpPr>
@@ -6864,7 +6829,7 @@
         </p:cxnSp>
         <p:cxnSp>
           <p:nvCxnSpPr>
-            <p:cNvPr id="96" name="マスの線 21"/>
+            <p:cNvPr id="95" name="マスの線 21"/>
             <p:cNvCxnSpPr/>
             <p:nvPr/>
           </p:nvCxnSpPr>
@@ -6901,7 +6866,7 @@
       </p:grpSp>
       <p:grpSp>
         <p:nvGrpSpPr>
-          <p:cNvPr id="97" name="5行目"/>
+          <p:cNvPr id="96" name="5行目"/>
           <p:cNvGrpSpPr/>
           <p:nvPr/>
         </p:nvGrpSpPr>
@@ -6915,7 +6880,7 @@
         </p:grpSpPr>
         <p:sp>
           <p:nvSpPr>
-            <p:cNvPr id="98" name="外わく"/>
+            <p:cNvPr id="97" name="外わく"/>
             <p:cNvSpPr/>
             <p:nvPr/>
           </p:nvSpPr>
@@ -6959,7 +6924,7 @@
         </p:sp>
         <p:cxnSp>
           <p:nvCxnSpPr>
-            <p:cNvPr id="99" name="マスの線 1"/>
+            <p:cNvPr id="98" name="マスの線 1"/>
             <p:cNvCxnSpPr/>
             <p:nvPr/>
           </p:nvCxnSpPr>
@@ -6995,7 +6960,7 @@
         </p:cxnSp>
         <p:cxnSp>
           <p:nvCxnSpPr>
-            <p:cNvPr id="100" name="マスの線 2"/>
+            <p:cNvPr id="99" name="マスの線 2"/>
             <p:cNvCxnSpPr/>
             <p:nvPr/>
           </p:nvCxnSpPr>
@@ -7031,7 +6996,7 @@
         </p:cxnSp>
         <p:cxnSp>
           <p:nvCxnSpPr>
-            <p:cNvPr id="101" name="マスの線 3"/>
+            <p:cNvPr id="100" name="マスの線 3"/>
             <p:cNvCxnSpPr/>
             <p:nvPr/>
           </p:nvCxnSpPr>
@@ -7067,7 +7032,7 @@
         </p:cxnSp>
         <p:cxnSp>
           <p:nvCxnSpPr>
-            <p:cNvPr id="102" name="マスの線 4"/>
+            <p:cNvPr id="101" name="マスの線 4"/>
             <p:cNvCxnSpPr/>
             <p:nvPr/>
           </p:nvCxnSpPr>
@@ -7103,7 +7068,7 @@
         </p:cxnSp>
         <p:cxnSp>
           <p:nvCxnSpPr>
-            <p:cNvPr id="103" name="マスの線 5"/>
+            <p:cNvPr id="102" name="マスの線 5"/>
             <p:cNvCxnSpPr/>
             <p:nvPr/>
           </p:nvCxnSpPr>
@@ -7139,7 +7104,7 @@
         </p:cxnSp>
         <p:cxnSp>
           <p:nvCxnSpPr>
-            <p:cNvPr id="104" name="マスの線 6"/>
+            <p:cNvPr id="103" name="マスの線 6"/>
             <p:cNvCxnSpPr/>
             <p:nvPr/>
           </p:nvCxnSpPr>
@@ -7175,7 +7140,7 @@
         </p:cxnSp>
         <p:cxnSp>
           <p:nvCxnSpPr>
-            <p:cNvPr id="105" name="マスの線 7"/>
+            <p:cNvPr id="104" name="マスの線 7"/>
             <p:cNvCxnSpPr/>
             <p:nvPr/>
           </p:nvCxnSpPr>
@@ -7211,7 +7176,7 @@
         </p:cxnSp>
         <p:cxnSp>
           <p:nvCxnSpPr>
-            <p:cNvPr id="106" name="マスの線 8"/>
+            <p:cNvPr id="105" name="マスの線 8"/>
             <p:cNvCxnSpPr/>
             <p:nvPr/>
           </p:nvCxnSpPr>
@@ -7247,7 +7212,7 @@
         </p:cxnSp>
         <p:cxnSp>
           <p:nvCxnSpPr>
-            <p:cNvPr id="107" name="マスの線 9"/>
+            <p:cNvPr id="106" name="マスの線 9"/>
             <p:cNvCxnSpPr/>
             <p:nvPr/>
           </p:nvCxnSpPr>
@@ -7283,7 +7248,7 @@
         </p:cxnSp>
         <p:cxnSp>
           <p:nvCxnSpPr>
-            <p:cNvPr id="108" name="マスの線 10"/>
+            <p:cNvPr id="107" name="マスの線 10"/>
             <p:cNvCxnSpPr/>
             <p:nvPr/>
           </p:nvCxnSpPr>
@@ -7319,7 +7284,7 @@
         </p:cxnSp>
         <p:cxnSp>
           <p:nvCxnSpPr>
-            <p:cNvPr id="109" name="マスの線 11"/>
+            <p:cNvPr id="108" name="マスの線 11"/>
             <p:cNvCxnSpPr/>
             <p:nvPr/>
           </p:nvCxnSpPr>
@@ -7355,7 +7320,7 @@
         </p:cxnSp>
         <p:cxnSp>
           <p:nvCxnSpPr>
-            <p:cNvPr id="110" name="マスの線 12"/>
+            <p:cNvPr id="109" name="マスの線 12"/>
             <p:cNvCxnSpPr/>
             <p:nvPr/>
           </p:nvCxnSpPr>
@@ -7391,7 +7356,7 @@
         </p:cxnSp>
         <p:cxnSp>
           <p:nvCxnSpPr>
-            <p:cNvPr id="111" name="マスの線 13"/>
+            <p:cNvPr id="110" name="マスの線 13"/>
             <p:cNvCxnSpPr/>
             <p:nvPr/>
           </p:nvCxnSpPr>
@@ -7427,7 +7392,7 @@
         </p:cxnSp>
         <p:cxnSp>
           <p:nvCxnSpPr>
-            <p:cNvPr id="112" name="マスの線 14"/>
+            <p:cNvPr id="111" name="マスの線 14"/>
             <p:cNvCxnSpPr/>
             <p:nvPr/>
           </p:nvCxnSpPr>
@@ -7463,7 +7428,7 @@
         </p:cxnSp>
         <p:cxnSp>
           <p:nvCxnSpPr>
-            <p:cNvPr id="113" name="マスの線 15"/>
+            <p:cNvPr id="112" name="マスの線 15"/>
             <p:cNvCxnSpPr/>
             <p:nvPr/>
           </p:nvCxnSpPr>
@@ -7499,7 +7464,7 @@
         </p:cxnSp>
         <p:cxnSp>
           <p:nvCxnSpPr>
-            <p:cNvPr id="114" name="マスの線 16"/>
+            <p:cNvPr id="113" name="マスの線 16"/>
             <p:cNvCxnSpPr/>
             <p:nvPr/>
           </p:nvCxnSpPr>
@@ -7535,7 +7500,7 @@
         </p:cxnSp>
         <p:cxnSp>
           <p:nvCxnSpPr>
-            <p:cNvPr id="115" name="マスの線 17"/>
+            <p:cNvPr id="114" name="マスの線 17"/>
             <p:cNvCxnSpPr/>
             <p:nvPr/>
           </p:nvCxnSpPr>
@@ -7571,7 +7536,7 @@
         </p:cxnSp>
         <p:cxnSp>
           <p:nvCxnSpPr>
-            <p:cNvPr id="116" name="マスの線 18"/>
+            <p:cNvPr id="115" name="マスの線 18"/>
             <p:cNvCxnSpPr/>
             <p:nvPr/>
           </p:nvCxnSpPr>
@@ -7607,7 +7572,7 @@
         </p:cxnSp>
         <p:cxnSp>
           <p:nvCxnSpPr>
-            <p:cNvPr id="117" name="マスの線 19"/>
+            <p:cNvPr id="116" name="マスの線 19"/>
             <p:cNvCxnSpPr/>
             <p:nvPr/>
           </p:nvCxnSpPr>
@@ -7643,7 +7608,7 @@
         </p:cxnSp>
         <p:cxnSp>
           <p:nvCxnSpPr>
-            <p:cNvPr id="118" name="マスの線 20"/>
+            <p:cNvPr id="117" name="マスの線 20"/>
             <p:cNvCxnSpPr/>
             <p:nvPr/>
           </p:nvCxnSpPr>
@@ -7679,7 +7644,7 @@
         </p:cxnSp>
         <p:cxnSp>
           <p:nvCxnSpPr>
-            <p:cNvPr id="119" name="マスの線 21"/>
+            <p:cNvPr id="118" name="マスの線 21"/>
             <p:cNvCxnSpPr/>
             <p:nvPr/>
           </p:nvCxnSpPr>
@@ -7716,7 +7681,7 @@
       </p:grpSp>
       <p:grpSp>
         <p:nvGrpSpPr>
-          <p:cNvPr id="120" name="6行目"/>
+          <p:cNvPr id="119" name="6行目"/>
           <p:cNvGrpSpPr/>
           <p:nvPr/>
         </p:nvGrpSpPr>
@@ -7730,7 +7695,7 @@
         </p:grpSpPr>
         <p:sp>
           <p:nvSpPr>
-            <p:cNvPr id="121" name="外わく"/>
+            <p:cNvPr id="120" name="外わく"/>
             <p:cNvSpPr/>
             <p:nvPr/>
           </p:nvSpPr>
@@ -7774,7 +7739,7 @@
         </p:sp>
         <p:cxnSp>
           <p:nvCxnSpPr>
-            <p:cNvPr id="122" name="マスの線 1"/>
+            <p:cNvPr id="121" name="マスの線 1"/>
             <p:cNvCxnSpPr/>
             <p:nvPr/>
           </p:nvCxnSpPr>
@@ -7810,7 +7775,7 @@
         </p:cxnSp>
         <p:cxnSp>
           <p:nvCxnSpPr>
-            <p:cNvPr id="123" name="マスの線 2"/>
+            <p:cNvPr id="122" name="マスの線 2"/>
             <p:cNvCxnSpPr/>
             <p:nvPr/>
           </p:nvCxnSpPr>
@@ -7846,7 +7811,7 @@
         </p:cxnSp>
         <p:cxnSp>
           <p:nvCxnSpPr>
-            <p:cNvPr id="124" name="マスの線 3"/>
+            <p:cNvPr id="123" name="マスの線 3"/>
             <p:cNvCxnSpPr/>
             <p:nvPr/>
           </p:nvCxnSpPr>
@@ -7882,7 +7847,7 @@
         </p:cxnSp>
         <p:cxnSp>
           <p:nvCxnSpPr>
-            <p:cNvPr id="125" name="マスの線 4"/>
+            <p:cNvPr id="124" name="マスの線 4"/>
             <p:cNvCxnSpPr/>
             <p:nvPr/>
           </p:nvCxnSpPr>
@@ -7918,7 +7883,7 @@
         </p:cxnSp>
         <p:cxnSp>
           <p:nvCxnSpPr>
-            <p:cNvPr id="126" name="マスの線 5"/>
+            <p:cNvPr id="125" name="マスの線 5"/>
             <p:cNvCxnSpPr/>
             <p:nvPr/>
           </p:nvCxnSpPr>
@@ -7954,7 +7919,7 @@
         </p:cxnSp>
         <p:cxnSp>
           <p:nvCxnSpPr>
-            <p:cNvPr id="127" name="マスの線 6"/>
+            <p:cNvPr id="126" name="マスの線 6"/>
             <p:cNvCxnSpPr/>
             <p:nvPr/>
           </p:nvCxnSpPr>
@@ -7990,7 +7955,7 @@
         </p:cxnSp>
         <p:cxnSp>
           <p:nvCxnSpPr>
-            <p:cNvPr id="128" name="マスの線 7"/>
+            <p:cNvPr id="127" name="マスの線 7"/>
             <p:cNvCxnSpPr/>
             <p:nvPr/>
           </p:nvCxnSpPr>
@@ -8026,7 +7991,7 @@
         </p:cxnSp>
         <p:cxnSp>
           <p:nvCxnSpPr>
-            <p:cNvPr id="129" name="マスの線 8"/>
+            <p:cNvPr id="128" name="マスの線 8"/>
             <p:cNvCxnSpPr/>
             <p:nvPr/>
           </p:nvCxnSpPr>
@@ -8062,7 +8027,7 @@
         </p:cxnSp>
         <p:cxnSp>
           <p:nvCxnSpPr>
-            <p:cNvPr id="130" name="マスの線 9"/>
+            <p:cNvPr id="129" name="マスの線 9"/>
             <p:cNvCxnSpPr/>
             <p:nvPr/>
           </p:nvCxnSpPr>
@@ -8098,7 +8063,7 @@
         </p:cxnSp>
         <p:cxnSp>
           <p:nvCxnSpPr>
-            <p:cNvPr id="131" name="マスの線 10"/>
+            <p:cNvPr id="130" name="マスの線 10"/>
             <p:cNvCxnSpPr/>
             <p:nvPr/>
           </p:nvCxnSpPr>
@@ -8134,7 +8099,7 @@
         </p:cxnSp>
         <p:cxnSp>
           <p:nvCxnSpPr>
-            <p:cNvPr id="132" name="マスの線 11"/>
+            <p:cNvPr id="131" name="マスの線 11"/>
             <p:cNvCxnSpPr/>
             <p:nvPr/>
           </p:nvCxnSpPr>
@@ -8170,7 +8135,7 @@
         </p:cxnSp>
         <p:cxnSp>
           <p:nvCxnSpPr>
-            <p:cNvPr id="133" name="マスの線 12"/>
+            <p:cNvPr id="132" name="マスの線 12"/>
             <p:cNvCxnSpPr/>
             <p:nvPr/>
           </p:nvCxnSpPr>
@@ -8206,7 +8171,7 @@
         </p:cxnSp>
         <p:cxnSp>
           <p:nvCxnSpPr>
-            <p:cNvPr id="134" name="マスの線 13"/>
+            <p:cNvPr id="133" name="マスの線 13"/>
             <p:cNvCxnSpPr/>
             <p:nvPr/>
           </p:nvCxnSpPr>
@@ -8242,7 +8207,7 @@
         </p:cxnSp>
         <p:cxnSp>
           <p:nvCxnSpPr>
-            <p:cNvPr id="135" name="マスの線 14"/>
+            <p:cNvPr id="134" name="マスの線 14"/>
             <p:cNvCxnSpPr/>
             <p:nvPr/>
           </p:nvCxnSpPr>
@@ -8278,7 +8243,7 @@
         </p:cxnSp>
         <p:cxnSp>
           <p:nvCxnSpPr>
-            <p:cNvPr id="136" name="マスの線 15"/>
+            <p:cNvPr id="135" name="マスの線 15"/>
             <p:cNvCxnSpPr/>
             <p:nvPr/>
           </p:nvCxnSpPr>
@@ -8314,7 +8279,7 @@
         </p:cxnSp>
         <p:cxnSp>
           <p:nvCxnSpPr>
-            <p:cNvPr id="137" name="マスの線 16"/>
+            <p:cNvPr id="136" name="マスの線 16"/>
             <p:cNvCxnSpPr/>
             <p:nvPr/>
           </p:nvCxnSpPr>
@@ -8350,7 +8315,7 @@
         </p:cxnSp>
         <p:cxnSp>
           <p:nvCxnSpPr>
-            <p:cNvPr id="138" name="マスの線 17"/>
+            <p:cNvPr id="137" name="マスの線 17"/>
             <p:cNvCxnSpPr/>
             <p:nvPr/>
           </p:nvCxnSpPr>
@@ -8386,7 +8351,7 @@
         </p:cxnSp>
         <p:cxnSp>
           <p:nvCxnSpPr>
-            <p:cNvPr id="139" name="マスの線 18"/>
+            <p:cNvPr id="138" name="マスの線 18"/>
             <p:cNvCxnSpPr/>
             <p:nvPr/>
           </p:nvCxnSpPr>
@@ -8422,7 +8387,7 @@
         </p:cxnSp>
         <p:cxnSp>
           <p:nvCxnSpPr>
-            <p:cNvPr id="140" name="マスの線 19"/>
+            <p:cNvPr id="139" name="マスの線 19"/>
             <p:cNvCxnSpPr/>
             <p:nvPr/>
           </p:nvCxnSpPr>
@@ -8458,7 +8423,7 @@
         </p:cxnSp>
         <p:cxnSp>
           <p:nvCxnSpPr>
-            <p:cNvPr id="141" name="マスの線 20"/>
+            <p:cNvPr id="140" name="マスの線 20"/>
             <p:cNvCxnSpPr/>
             <p:nvPr/>
           </p:nvCxnSpPr>
@@ -8494,7 +8459,7 @@
         </p:cxnSp>
         <p:cxnSp>
           <p:nvCxnSpPr>
-            <p:cNvPr id="142" name="マスの線 21"/>
+            <p:cNvPr id="141" name="マスの線 21"/>
             <p:cNvCxnSpPr/>
             <p:nvPr/>
           </p:nvCxnSpPr>
@@ -8531,7 +8496,7 @@
       </p:grpSp>
       <p:grpSp>
         <p:nvGrpSpPr>
-          <p:cNvPr id="143" name="7行目"/>
+          <p:cNvPr id="142" name="7行目"/>
           <p:cNvGrpSpPr/>
           <p:nvPr/>
         </p:nvGrpSpPr>
@@ -8545,7 +8510,7 @@
         </p:grpSpPr>
         <p:sp>
           <p:nvSpPr>
-            <p:cNvPr id="144" name="外わく"/>
+            <p:cNvPr id="143" name="外わく"/>
             <p:cNvSpPr/>
             <p:nvPr/>
           </p:nvSpPr>
@@ -8589,7 +8554,7 @@
         </p:sp>
         <p:cxnSp>
           <p:nvCxnSpPr>
-            <p:cNvPr id="145" name="マスの線 1"/>
+            <p:cNvPr id="144" name="マスの線 1"/>
             <p:cNvCxnSpPr/>
             <p:nvPr/>
           </p:nvCxnSpPr>
@@ -8625,7 +8590,7 @@
         </p:cxnSp>
         <p:cxnSp>
           <p:nvCxnSpPr>
-            <p:cNvPr id="146" name="マスの線 2"/>
+            <p:cNvPr id="145" name="マスの線 2"/>
             <p:cNvCxnSpPr/>
             <p:nvPr/>
           </p:nvCxnSpPr>
@@ -8661,7 +8626,7 @@
         </p:cxnSp>
         <p:cxnSp>
           <p:nvCxnSpPr>
-            <p:cNvPr id="147" name="マスの線 3"/>
+            <p:cNvPr id="146" name="マスの線 3"/>
             <p:cNvCxnSpPr/>
             <p:nvPr/>
           </p:nvCxnSpPr>
@@ -8697,7 +8662,7 @@
         </p:cxnSp>
         <p:cxnSp>
           <p:nvCxnSpPr>
-            <p:cNvPr id="148" name="マスの線 4"/>
+            <p:cNvPr id="147" name="マスの線 4"/>
             <p:cNvCxnSpPr/>
             <p:nvPr/>
           </p:nvCxnSpPr>
@@ -8733,7 +8698,7 @@
         </p:cxnSp>
         <p:cxnSp>
           <p:nvCxnSpPr>
-            <p:cNvPr id="149" name="マスの線 5"/>
+            <p:cNvPr id="148" name="マスの線 5"/>
             <p:cNvCxnSpPr/>
             <p:nvPr/>
           </p:nvCxnSpPr>
@@ -8769,7 +8734,7 @@
         </p:cxnSp>
         <p:cxnSp>
           <p:nvCxnSpPr>
-            <p:cNvPr id="150" name="マスの線 6"/>
+            <p:cNvPr id="149" name="マスの線 6"/>
             <p:cNvCxnSpPr/>
             <p:nvPr/>
           </p:nvCxnSpPr>
@@ -8805,7 +8770,7 @@
         </p:cxnSp>
         <p:cxnSp>
           <p:nvCxnSpPr>
-            <p:cNvPr id="151" name="マスの線 7"/>
+            <p:cNvPr id="150" name="マスの線 7"/>
             <p:cNvCxnSpPr/>
             <p:nvPr/>
           </p:nvCxnSpPr>
@@ -8841,7 +8806,7 @@
         </p:cxnSp>
         <p:cxnSp>
           <p:nvCxnSpPr>
-            <p:cNvPr id="152" name="マスの線 8"/>
+            <p:cNvPr id="151" name="マスの線 8"/>
             <p:cNvCxnSpPr/>
             <p:nvPr/>
           </p:nvCxnSpPr>
@@ -8877,7 +8842,7 @@
         </p:cxnSp>
         <p:cxnSp>
           <p:nvCxnSpPr>
-            <p:cNvPr id="153" name="マスの線 9"/>
+            <p:cNvPr id="152" name="マスの線 9"/>
             <p:cNvCxnSpPr/>
             <p:nvPr/>
           </p:nvCxnSpPr>
@@ -8913,7 +8878,7 @@
         </p:cxnSp>
         <p:cxnSp>
           <p:nvCxnSpPr>
-            <p:cNvPr id="154" name="マスの線 10"/>
+            <p:cNvPr id="153" name="マスの線 10"/>
             <p:cNvCxnSpPr/>
             <p:nvPr/>
           </p:nvCxnSpPr>
@@ -8949,7 +8914,7 @@
         </p:cxnSp>
         <p:cxnSp>
           <p:nvCxnSpPr>
-            <p:cNvPr id="155" name="マスの線 11"/>
+            <p:cNvPr id="154" name="マスの線 11"/>
             <p:cNvCxnSpPr/>
             <p:nvPr/>
           </p:nvCxnSpPr>
@@ -8985,7 +8950,7 @@
         </p:cxnSp>
         <p:cxnSp>
           <p:nvCxnSpPr>
-            <p:cNvPr id="156" name="マスの線 12"/>
+            <p:cNvPr id="155" name="マスの線 12"/>
             <p:cNvCxnSpPr/>
             <p:nvPr/>
           </p:nvCxnSpPr>
@@ -9021,7 +8986,7 @@
         </p:cxnSp>
         <p:cxnSp>
           <p:nvCxnSpPr>
-            <p:cNvPr id="157" name="マスの線 13"/>
+            <p:cNvPr id="156" name="マスの線 13"/>
             <p:cNvCxnSpPr/>
             <p:nvPr/>
           </p:nvCxnSpPr>
@@ -9057,7 +9022,7 @@
         </p:cxnSp>
         <p:cxnSp>
           <p:nvCxnSpPr>
-            <p:cNvPr id="158" name="マスの線 14"/>
+            <p:cNvPr id="157" name="マスの線 14"/>
             <p:cNvCxnSpPr/>
             <p:nvPr/>
           </p:nvCxnSpPr>
@@ -9093,7 +9058,7 @@
         </p:cxnSp>
         <p:cxnSp>
           <p:nvCxnSpPr>
-            <p:cNvPr id="159" name="マスの線 15"/>
+            <p:cNvPr id="158" name="マスの線 15"/>
             <p:cNvCxnSpPr/>
             <p:nvPr/>
           </p:nvCxnSpPr>
@@ -9129,7 +9094,7 @@
         </p:cxnSp>
         <p:cxnSp>
           <p:nvCxnSpPr>
-            <p:cNvPr id="160" name="マスの線 16"/>
+            <p:cNvPr id="159" name="マスの線 16"/>
             <p:cNvCxnSpPr/>
             <p:nvPr/>
           </p:nvCxnSpPr>
@@ -9165,7 +9130,7 @@
         </p:cxnSp>
         <p:cxnSp>
           <p:nvCxnSpPr>
-            <p:cNvPr id="161" name="マスの線 17"/>
+            <p:cNvPr id="160" name="マスの線 17"/>
             <p:cNvCxnSpPr/>
             <p:nvPr/>
           </p:nvCxnSpPr>
@@ -9201,7 +9166,7 @@
         </p:cxnSp>
         <p:cxnSp>
           <p:nvCxnSpPr>
-            <p:cNvPr id="162" name="マスの線 18"/>
+            <p:cNvPr id="161" name="マスの線 18"/>
             <p:cNvCxnSpPr/>
             <p:nvPr/>
           </p:nvCxnSpPr>
@@ -9237,7 +9202,7 @@
         </p:cxnSp>
         <p:cxnSp>
           <p:nvCxnSpPr>
-            <p:cNvPr id="163" name="マスの線 19"/>
+            <p:cNvPr id="162" name="マスの線 19"/>
             <p:cNvCxnSpPr/>
             <p:nvPr/>
           </p:nvCxnSpPr>
@@ -9273,7 +9238,7 @@
         </p:cxnSp>
         <p:cxnSp>
           <p:nvCxnSpPr>
-            <p:cNvPr id="164" name="マスの線 20"/>
+            <p:cNvPr id="163" name="マスの線 20"/>
             <p:cNvCxnSpPr/>
             <p:nvPr/>
           </p:nvCxnSpPr>
@@ -9309,7 +9274,7 @@
         </p:cxnSp>
         <p:cxnSp>
           <p:nvCxnSpPr>
-            <p:cNvPr id="165" name="マスの線 21"/>
+            <p:cNvPr id="164" name="マスの線 21"/>
             <p:cNvCxnSpPr/>
             <p:nvPr/>
           </p:nvCxnSpPr>
@@ -9346,7 +9311,7 @@
       </p:grpSp>
       <p:grpSp>
         <p:nvGrpSpPr>
-          <p:cNvPr id="166" name="8行目"/>
+          <p:cNvPr id="165" name="8行目"/>
           <p:cNvGrpSpPr/>
           <p:nvPr/>
         </p:nvGrpSpPr>
@@ -9360,7 +9325,7 @@
         </p:grpSpPr>
         <p:sp>
           <p:nvSpPr>
-            <p:cNvPr id="167" name="外わく"/>
+            <p:cNvPr id="166" name="外わく"/>
             <p:cNvSpPr/>
             <p:nvPr/>
           </p:nvSpPr>
@@ -9404,7 +9369,7 @@
         </p:sp>
         <p:cxnSp>
           <p:nvCxnSpPr>
-            <p:cNvPr id="168" name="マスの線 1"/>
+            <p:cNvPr id="167" name="マスの線 1"/>
             <p:cNvCxnSpPr/>
             <p:nvPr/>
           </p:nvCxnSpPr>
@@ -9440,7 +9405,7 @@
         </p:cxnSp>
         <p:cxnSp>
           <p:nvCxnSpPr>
-            <p:cNvPr id="169" name="マスの線 2"/>
+            <p:cNvPr id="168" name="マスの線 2"/>
             <p:cNvCxnSpPr/>
             <p:nvPr/>
           </p:nvCxnSpPr>
@@ -9476,7 +9441,7 @@
         </p:cxnSp>
         <p:cxnSp>
           <p:nvCxnSpPr>
-            <p:cNvPr id="170" name="マスの線 3"/>
+            <p:cNvPr id="169" name="マスの線 3"/>
             <p:cNvCxnSpPr/>
             <p:nvPr/>
           </p:nvCxnSpPr>
@@ -9512,7 +9477,7 @@
         </p:cxnSp>
         <p:cxnSp>
           <p:nvCxnSpPr>
-            <p:cNvPr id="171" name="マスの線 4"/>
+            <p:cNvPr id="170" name="マスの線 4"/>
             <p:cNvCxnSpPr/>
             <p:nvPr/>
           </p:nvCxnSpPr>
@@ -9548,7 +9513,7 @@
         </p:cxnSp>
         <p:cxnSp>
           <p:nvCxnSpPr>
-            <p:cNvPr id="172" name="マスの線 5"/>
+            <p:cNvPr id="171" name="マスの線 5"/>
             <p:cNvCxnSpPr/>
             <p:nvPr/>
           </p:nvCxnSpPr>
@@ -9584,7 +9549,7 @@
         </p:cxnSp>
         <p:cxnSp>
           <p:nvCxnSpPr>
-            <p:cNvPr id="173" name="マスの線 6"/>
+            <p:cNvPr id="172" name="マスの線 6"/>
             <p:cNvCxnSpPr/>
             <p:nvPr/>
           </p:nvCxnSpPr>
@@ -9620,7 +9585,7 @@
         </p:cxnSp>
         <p:cxnSp>
           <p:nvCxnSpPr>
-            <p:cNvPr id="174" name="マスの線 7"/>
+            <p:cNvPr id="173" name="マスの線 7"/>
             <p:cNvCxnSpPr/>
             <p:nvPr/>
           </p:nvCxnSpPr>
@@ -9656,7 +9621,7 @@
         </p:cxnSp>
         <p:cxnSp>
           <p:nvCxnSpPr>
-            <p:cNvPr id="175" name="マスの線 8"/>
+            <p:cNvPr id="174" name="マスの線 8"/>
             <p:cNvCxnSpPr/>
             <p:nvPr/>
           </p:nvCxnSpPr>
@@ -9692,7 +9657,7 @@
         </p:cxnSp>
         <p:cxnSp>
           <p:nvCxnSpPr>
-            <p:cNvPr id="176" name="マスの線 9"/>
+            <p:cNvPr id="175" name="マスの線 9"/>
             <p:cNvCxnSpPr/>
             <p:nvPr/>
           </p:nvCxnSpPr>
@@ -9728,7 +9693,7 @@
         </p:cxnSp>
         <p:cxnSp>
           <p:nvCxnSpPr>
-            <p:cNvPr id="177" name="マスの線 10"/>
+            <p:cNvPr id="176" name="マスの線 10"/>
             <p:cNvCxnSpPr/>
             <p:nvPr/>
           </p:nvCxnSpPr>
@@ -9764,7 +9729,7 @@
         </p:cxnSp>
         <p:cxnSp>
           <p:nvCxnSpPr>
-            <p:cNvPr id="178" name="マスの線 11"/>
+            <p:cNvPr id="177" name="マスの線 11"/>
             <p:cNvCxnSpPr/>
             <p:nvPr/>
           </p:nvCxnSpPr>
@@ -9800,7 +9765,7 @@
         </p:cxnSp>
         <p:cxnSp>
           <p:nvCxnSpPr>
-            <p:cNvPr id="179" name="マスの線 12"/>
+            <p:cNvPr id="178" name="マスの線 12"/>
             <p:cNvCxnSpPr/>
             <p:nvPr/>
           </p:nvCxnSpPr>
@@ -9836,7 +9801,7 @@
         </p:cxnSp>
         <p:cxnSp>
           <p:nvCxnSpPr>
-            <p:cNvPr id="180" name="マスの線 13"/>
+            <p:cNvPr id="179" name="マスの線 13"/>
             <p:cNvCxnSpPr/>
             <p:nvPr/>
           </p:nvCxnSpPr>
@@ -9872,7 +9837,7 @@
         </p:cxnSp>
         <p:cxnSp>
           <p:nvCxnSpPr>
-            <p:cNvPr id="181" name="マスの線 14"/>
+            <p:cNvPr id="180" name="マスの線 14"/>
             <p:cNvCxnSpPr/>
             <p:nvPr/>
           </p:nvCxnSpPr>
@@ -9908,7 +9873,7 @@
         </p:cxnSp>
         <p:cxnSp>
           <p:nvCxnSpPr>
-            <p:cNvPr id="182" name="マスの線 15"/>
+            <p:cNvPr id="181" name="マスの線 15"/>
             <p:cNvCxnSpPr/>
             <p:nvPr/>
           </p:nvCxnSpPr>
@@ -9944,7 +9909,7 @@
         </p:cxnSp>
         <p:cxnSp>
           <p:nvCxnSpPr>
-            <p:cNvPr id="183" name="マスの線 16"/>
+            <p:cNvPr id="182" name="マスの線 16"/>
             <p:cNvCxnSpPr/>
             <p:nvPr/>
           </p:nvCxnSpPr>
@@ -9980,7 +9945,7 @@
         </p:cxnSp>
         <p:cxnSp>
           <p:nvCxnSpPr>
-            <p:cNvPr id="184" name="マスの線 17"/>
+            <p:cNvPr id="183" name="マスの線 17"/>
             <p:cNvCxnSpPr/>
             <p:nvPr/>
           </p:nvCxnSpPr>
@@ -10016,7 +9981,7 @@
         </p:cxnSp>
         <p:cxnSp>
           <p:nvCxnSpPr>
-            <p:cNvPr id="185" name="マスの線 18"/>
+            <p:cNvPr id="184" name="マスの線 18"/>
             <p:cNvCxnSpPr/>
             <p:nvPr/>
           </p:nvCxnSpPr>
@@ -10052,7 +10017,7 @@
         </p:cxnSp>
         <p:cxnSp>
           <p:nvCxnSpPr>
-            <p:cNvPr id="186" name="マスの線 19"/>
+            <p:cNvPr id="185" name="マスの線 19"/>
             <p:cNvCxnSpPr/>
             <p:nvPr/>
           </p:nvCxnSpPr>
@@ -10088,7 +10053,7 @@
         </p:cxnSp>
         <p:cxnSp>
           <p:nvCxnSpPr>
-            <p:cNvPr id="187" name="マスの線 20"/>
+            <p:cNvPr id="186" name="マスの線 20"/>
             <p:cNvCxnSpPr/>
             <p:nvPr/>
           </p:nvCxnSpPr>
@@ -10124,7 +10089,7 @@
         </p:cxnSp>
         <p:cxnSp>
           <p:nvCxnSpPr>
-            <p:cNvPr id="188" name="マスの線 21"/>
+            <p:cNvPr id="187" name="マスの線 21"/>
             <p:cNvCxnSpPr/>
             <p:nvPr/>
           </p:nvCxnSpPr>
@@ -10161,7 +10126,7 @@
       </p:grpSp>
       <p:grpSp>
         <p:nvGrpSpPr>
-          <p:cNvPr id="189" name="9行目"/>
+          <p:cNvPr id="188" name="9行目"/>
           <p:cNvGrpSpPr/>
           <p:nvPr/>
         </p:nvGrpSpPr>
@@ -10175,7 +10140,7 @@
         </p:grpSpPr>
         <p:sp>
           <p:nvSpPr>
-            <p:cNvPr id="190" name="外わく"/>
+            <p:cNvPr id="189" name="外わく"/>
             <p:cNvSpPr/>
             <p:nvPr/>
           </p:nvSpPr>
@@ -10219,7 +10184,7 @@
         </p:sp>
         <p:cxnSp>
           <p:nvCxnSpPr>
-            <p:cNvPr id="191" name="マスの線 1"/>
+            <p:cNvPr id="190" name="マスの線 1"/>
             <p:cNvCxnSpPr/>
             <p:nvPr/>
           </p:nvCxnSpPr>
@@ -10255,7 +10220,7 @@
         </p:cxnSp>
         <p:cxnSp>
           <p:nvCxnSpPr>
-            <p:cNvPr id="192" name="マスの線 2"/>
+            <p:cNvPr id="191" name="マスの線 2"/>
             <p:cNvCxnSpPr/>
             <p:nvPr/>
           </p:nvCxnSpPr>
@@ -10291,7 +10256,7 @@
         </p:cxnSp>
         <p:cxnSp>
           <p:nvCxnSpPr>
-            <p:cNvPr id="193" name="マスの線 3"/>
+            <p:cNvPr id="192" name="マスの線 3"/>
             <p:cNvCxnSpPr/>
             <p:nvPr/>
           </p:nvCxnSpPr>
@@ -10327,7 +10292,7 @@
         </p:cxnSp>
         <p:cxnSp>
           <p:nvCxnSpPr>
-            <p:cNvPr id="194" name="マスの線 4"/>
+            <p:cNvPr id="193" name="マスの線 4"/>
             <p:cNvCxnSpPr/>
             <p:nvPr/>
           </p:nvCxnSpPr>
@@ -10363,7 +10328,7 @@
         </p:cxnSp>
         <p:cxnSp>
           <p:nvCxnSpPr>
-            <p:cNvPr id="195" name="マスの線 5"/>
+            <p:cNvPr id="194" name="マスの線 5"/>
             <p:cNvCxnSpPr/>
             <p:nvPr/>
           </p:nvCxnSpPr>
@@ -10399,7 +10364,7 @@
         </p:cxnSp>
         <p:cxnSp>
           <p:nvCxnSpPr>
-            <p:cNvPr id="196" name="マスの線 6"/>
+            <p:cNvPr id="195" name="マスの線 6"/>
             <p:cNvCxnSpPr/>
             <p:nvPr/>
           </p:nvCxnSpPr>
@@ -10435,7 +10400,7 @@
         </p:cxnSp>
         <p:cxnSp>
           <p:nvCxnSpPr>
-            <p:cNvPr id="197" name="マスの線 7"/>
+            <p:cNvPr id="196" name="マスの線 7"/>
             <p:cNvCxnSpPr/>
             <p:nvPr/>
           </p:nvCxnSpPr>
@@ -10471,7 +10436,7 @@
         </p:cxnSp>
         <p:cxnSp>
           <p:nvCxnSpPr>
-            <p:cNvPr id="198" name="マスの線 8"/>
+            <p:cNvPr id="197" name="マスの線 8"/>
             <p:cNvCxnSpPr/>
             <p:nvPr/>
           </p:nvCxnSpPr>
@@ -10507,7 +10472,7 @@
         </p:cxnSp>
         <p:cxnSp>
           <p:nvCxnSpPr>
-            <p:cNvPr id="199" name="マスの線 9"/>
+            <p:cNvPr id="198" name="マスの線 9"/>
             <p:cNvCxnSpPr/>
             <p:nvPr/>
           </p:nvCxnSpPr>
@@ -10543,7 +10508,7 @@
         </p:cxnSp>
         <p:cxnSp>
           <p:nvCxnSpPr>
-            <p:cNvPr id="200" name="マスの線 10"/>
+            <p:cNvPr id="199" name="マスの線 10"/>
             <p:cNvCxnSpPr/>
             <p:nvPr/>
           </p:nvCxnSpPr>
@@ -10579,7 +10544,7 @@
         </p:cxnSp>
         <p:cxnSp>
           <p:nvCxnSpPr>
-            <p:cNvPr id="201" name="マスの線 11"/>
+            <p:cNvPr id="200" name="マスの線 11"/>
             <p:cNvCxnSpPr/>
             <p:nvPr/>
           </p:nvCxnSpPr>
@@ -10615,7 +10580,7 @@
         </p:cxnSp>
         <p:cxnSp>
           <p:nvCxnSpPr>
-            <p:cNvPr id="202" name="マスの線 12"/>
+            <p:cNvPr id="201" name="マスの線 12"/>
             <p:cNvCxnSpPr/>
             <p:nvPr/>
           </p:nvCxnSpPr>
@@ -10651,7 +10616,7 @@
         </p:cxnSp>
         <p:cxnSp>
           <p:nvCxnSpPr>
-            <p:cNvPr id="203" name="マスの線 13"/>
+            <p:cNvPr id="202" name="マスの線 13"/>
             <p:cNvCxnSpPr/>
             <p:nvPr/>
           </p:nvCxnSpPr>
@@ -10687,7 +10652,7 @@
         </p:cxnSp>
         <p:cxnSp>
           <p:nvCxnSpPr>
-            <p:cNvPr id="204" name="マスの線 14"/>
+            <p:cNvPr id="203" name="マスの線 14"/>
             <p:cNvCxnSpPr/>
             <p:nvPr/>
           </p:nvCxnSpPr>
@@ -10723,7 +10688,7 @@
         </p:cxnSp>
         <p:cxnSp>
           <p:nvCxnSpPr>
-            <p:cNvPr id="205" name="マスの線 15"/>
+            <p:cNvPr id="204" name="マスの線 15"/>
             <p:cNvCxnSpPr/>
             <p:nvPr/>
           </p:nvCxnSpPr>
@@ -10759,7 +10724,7 @@
         </p:cxnSp>
         <p:cxnSp>
           <p:nvCxnSpPr>
-            <p:cNvPr id="206" name="マスの線 16"/>
+            <p:cNvPr id="205" name="マスの線 16"/>
             <p:cNvCxnSpPr/>
             <p:nvPr/>
           </p:nvCxnSpPr>
@@ -10795,7 +10760,7 @@
         </p:cxnSp>
         <p:cxnSp>
           <p:nvCxnSpPr>
-            <p:cNvPr id="207" name="マスの線 17"/>
+            <p:cNvPr id="206" name="マスの線 17"/>
             <p:cNvCxnSpPr/>
             <p:nvPr/>
           </p:nvCxnSpPr>
@@ -10831,7 +10796,7 @@
         </p:cxnSp>
         <p:cxnSp>
           <p:nvCxnSpPr>
-            <p:cNvPr id="208" name="マスの線 18"/>
+            <p:cNvPr id="207" name="マスの線 18"/>
             <p:cNvCxnSpPr/>
             <p:nvPr/>
           </p:nvCxnSpPr>
@@ -10867,7 +10832,7 @@
         </p:cxnSp>
         <p:cxnSp>
           <p:nvCxnSpPr>
-            <p:cNvPr id="209" name="マスの線 19"/>
+            <p:cNvPr id="208" name="マスの線 19"/>
             <p:cNvCxnSpPr/>
             <p:nvPr/>
           </p:nvCxnSpPr>
@@ -10903,7 +10868,7 @@
         </p:cxnSp>
         <p:cxnSp>
           <p:nvCxnSpPr>
-            <p:cNvPr id="210" name="マスの線 20"/>
+            <p:cNvPr id="209" name="マスの線 20"/>
             <p:cNvCxnSpPr/>
             <p:nvPr/>
           </p:nvCxnSpPr>
@@ -10939,7 +10904,7 @@
         </p:cxnSp>
         <p:cxnSp>
           <p:nvCxnSpPr>
-            <p:cNvPr id="211" name="マスの線 21"/>
+            <p:cNvPr id="210" name="マスの線 21"/>
             <p:cNvCxnSpPr/>
             <p:nvPr/>
           </p:nvCxnSpPr>
@@ -10976,7 +10941,7 @@
       </p:grpSp>
       <p:grpSp>
         <p:nvGrpSpPr>
-          <p:cNvPr id="212" name="10行目"/>
+          <p:cNvPr id="211" name="10行目"/>
           <p:cNvGrpSpPr/>
           <p:nvPr/>
         </p:nvGrpSpPr>
@@ -10990,7 +10955,7 @@
         </p:grpSpPr>
         <p:sp>
           <p:nvSpPr>
-            <p:cNvPr id="213" name="外わく"/>
+            <p:cNvPr id="212" name="外わく"/>
             <p:cNvSpPr/>
             <p:nvPr/>
           </p:nvSpPr>
@@ -11034,7 +10999,7 @@
         </p:sp>
         <p:cxnSp>
           <p:nvCxnSpPr>
-            <p:cNvPr id="214" name="マスの線 1"/>
+            <p:cNvPr id="213" name="マスの線 1"/>
             <p:cNvCxnSpPr/>
             <p:nvPr/>
           </p:nvCxnSpPr>
@@ -11070,7 +11035,7 @@
         </p:cxnSp>
         <p:cxnSp>
           <p:nvCxnSpPr>
-            <p:cNvPr id="215" name="マスの線 2"/>
+            <p:cNvPr id="214" name="マスの線 2"/>
             <p:cNvCxnSpPr/>
             <p:nvPr/>
           </p:nvCxnSpPr>
@@ -11106,7 +11071,7 @@
         </p:cxnSp>
         <p:cxnSp>
           <p:nvCxnSpPr>
-            <p:cNvPr id="216" name="マスの線 3"/>
+            <p:cNvPr id="215" name="マスの線 3"/>
             <p:cNvCxnSpPr/>
             <p:nvPr/>
           </p:nvCxnSpPr>
@@ -11142,7 +11107,7 @@
         </p:cxnSp>
         <p:cxnSp>
           <p:nvCxnSpPr>
-            <p:cNvPr id="217" name="マスの線 4"/>
+            <p:cNvPr id="216" name="マスの線 4"/>
             <p:cNvCxnSpPr/>
             <p:nvPr/>
           </p:nvCxnSpPr>
@@ -11178,7 +11143,7 @@
         </p:cxnSp>
         <p:cxnSp>
           <p:nvCxnSpPr>
-            <p:cNvPr id="218" name="マスの線 5"/>
+            <p:cNvPr id="217" name="マスの線 5"/>
             <p:cNvCxnSpPr/>
             <p:nvPr/>
           </p:nvCxnSpPr>
@@ -11214,7 +11179,7 @@
         </p:cxnSp>
         <p:cxnSp>
           <p:nvCxnSpPr>
-            <p:cNvPr id="219" name="マスの線 6"/>
+            <p:cNvPr id="218" name="マスの線 6"/>
             <p:cNvCxnSpPr/>
             <p:nvPr/>
           </p:nvCxnSpPr>
@@ -11250,7 +11215,7 @@
         </p:cxnSp>
         <p:cxnSp>
           <p:nvCxnSpPr>
-            <p:cNvPr id="220" name="マスの線 7"/>
+            <p:cNvPr id="219" name="マスの線 7"/>
             <p:cNvCxnSpPr/>
             <p:nvPr/>
           </p:nvCxnSpPr>
@@ -11286,7 +11251,7 @@
         </p:cxnSp>
         <p:cxnSp>
           <p:nvCxnSpPr>
-            <p:cNvPr id="221" name="マスの線 8"/>
+            <p:cNvPr id="220" name="マスの線 8"/>
             <p:cNvCxnSpPr/>
             <p:nvPr/>
           </p:nvCxnSpPr>
@@ -11322,7 +11287,7 @@
         </p:cxnSp>
         <p:cxnSp>
           <p:nvCxnSpPr>
-            <p:cNvPr id="222" name="マスの線 9"/>
+            <p:cNvPr id="221" name="マスの線 9"/>
             <p:cNvCxnSpPr/>
             <p:nvPr/>
           </p:nvCxnSpPr>
@@ -11358,7 +11323,7 @@
         </p:cxnSp>
         <p:cxnSp>
           <p:nvCxnSpPr>
-            <p:cNvPr id="223" name="マスの線 10"/>
+            <p:cNvPr id="222" name="マスの線 10"/>
             <p:cNvCxnSpPr/>
             <p:nvPr/>
           </p:nvCxnSpPr>
@@ -11394,7 +11359,7 @@
         </p:cxnSp>
         <p:cxnSp>
           <p:nvCxnSpPr>
-            <p:cNvPr id="224" name="マスの線 11"/>
+            <p:cNvPr id="223" name="マスの線 11"/>
             <p:cNvCxnSpPr/>
             <p:nvPr/>
           </p:nvCxnSpPr>
@@ -11430,7 +11395,7 @@
         </p:cxnSp>
         <p:cxnSp>
           <p:nvCxnSpPr>
-            <p:cNvPr id="225" name="マスの線 12"/>
+            <p:cNvPr id="224" name="マスの線 12"/>
             <p:cNvCxnSpPr/>
             <p:nvPr/>
           </p:nvCxnSpPr>
@@ -11466,7 +11431,7 @@
         </p:cxnSp>
         <p:cxnSp>
           <p:nvCxnSpPr>
-            <p:cNvPr id="226" name="マスの線 13"/>
+            <p:cNvPr id="225" name="マスの線 13"/>
             <p:cNvCxnSpPr/>
             <p:nvPr/>
           </p:nvCxnSpPr>
@@ -11502,7 +11467,7 @@
         </p:cxnSp>
         <p:cxnSp>
           <p:nvCxnSpPr>
-            <p:cNvPr id="227" name="マスの線 14"/>
+            <p:cNvPr id="226" name="マスの線 14"/>
             <p:cNvCxnSpPr/>
             <p:nvPr/>
           </p:nvCxnSpPr>
@@ -11538,7 +11503,7 @@
         </p:cxnSp>
         <p:cxnSp>
           <p:nvCxnSpPr>
-            <p:cNvPr id="228" name="マスの線 15"/>
+            <p:cNvPr id="227" name="マスの線 15"/>
             <p:cNvCxnSpPr/>
             <p:nvPr/>
           </p:nvCxnSpPr>
@@ -11574,7 +11539,7 @@
         </p:cxnSp>
         <p:cxnSp>
           <p:nvCxnSpPr>
-            <p:cNvPr id="229" name="マスの線 16"/>
+            <p:cNvPr id="228" name="マスの線 16"/>
             <p:cNvCxnSpPr/>
             <p:nvPr/>
           </p:nvCxnSpPr>
@@ -11610,7 +11575,7 @@
         </p:cxnSp>
         <p:cxnSp>
           <p:nvCxnSpPr>
-            <p:cNvPr id="230" name="マスの線 17"/>
+            <p:cNvPr id="229" name="マスの線 17"/>
             <p:cNvCxnSpPr/>
             <p:nvPr/>
           </p:nvCxnSpPr>
@@ -11646,7 +11611,7 @@
         </p:cxnSp>
         <p:cxnSp>
           <p:nvCxnSpPr>
-            <p:cNvPr id="231" name="マスの線 18"/>
+            <p:cNvPr id="230" name="マスの線 18"/>
             <p:cNvCxnSpPr/>
             <p:nvPr/>
           </p:nvCxnSpPr>
@@ -11682,7 +11647,7 @@
         </p:cxnSp>
         <p:cxnSp>
           <p:nvCxnSpPr>
-            <p:cNvPr id="232" name="マスの線 19"/>
+            <p:cNvPr id="231" name="マスの線 19"/>
             <p:cNvCxnSpPr/>
             <p:nvPr/>
           </p:nvCxnSpPr>
@@ -11718,7 +11683,7 @@
         </p:cxnSp>
         <p:cxnSp>
           <p:nvCxnSpPr>
-            <p:cNvPr id="233" name="マスの線 20"/>
+            <p:cNvPr id="232" name="マスの線 20"/>
             <p:cNvCxnSpPr/>
             <p:nvPr/>
           </p:nvCxnSpPr>
@@ -11754,7 +11719,7 @@
         </p:cxnSp>
         <p:cxnSp>
           <p:nvCxnSpPr>
-            <p:cNvPr id="234" name="マスの線 21"/>
+            <p:cNvPr id="233" name="マスの線 21"/>
             <p:cNvCxnSpPr/>
             <p:nvPr/>
           </p:nvCxnSpPr>
@@ -11791,7 +11756,7 @@
       </p:grpSp>
       <p:grpSp>
         <p:nvGrpSpPr>
-          <p:cNvPr id="235" name="11行目"/>
+          <p:cNvPr id="234" name="11行目"/>
           <p:cNvGrpSpPr/>
           <p:nvPr/>
         </p:nvGrpSpPr>
@@ -11805,7 +11770,7 @@
         </p:grpSpPr>
         <p:sp>
           <p:nvSpPr>
-            <p:cNvPr id="236" name="外わく"/>
+            <p:cNvPr id="235" name="外わく"/>
             <p:cNvSpPr/>
             <p:nvPr/>
           </p:nvSpPr>
@@ -11849,7 +11814,7 @@
         </p:sp>
         <p:cxnSp>
           <p:nvCxnSpPr>
-            <p:cNvPr id="237" name="マスの線 1"/>
+            <p:cNvPr id="236" name="マスの線 1"/>
             <p:cNvCxnSpPr/>
             <p:nvPr/>
           </p:nvCxnSpPr>
@@ -11885,7 +11850,7 @@
         </p:cxnSp>
         <p:cxnSp>
           <p:nvCxnSpPr>
-            <p:cNvPr id="238" name="マスの線 2"/>
+            <p:cNvPr id="237" name="マスの線 2"/>
             <p:cNvCxnSpPr/>
             <p:nvPr/>
           </p:nvCxnSpPr>
@@ -11921,7 +11886,7 @@
         </p:cxnSp>
         <p:cxnSp>
           <p:nvCxnSpPr>
-            <p:cNvPr id="239" name="マスの線 3"/>
+            <p:cNvPr id="238" name="マスの線 3"/>
             <p:cNvCxnSpPr/>
             <p:nvPr/>
           </p:nvCxnSpPr>
@@ -11957,7 +11922,7 @@
         </p:cxnSp>
         <p:cxnSp>
           <p:nvCxnSpPr>
-            <p:cNvPr id="240" name="マスの線 4"/>
+            <p:cNvPr id="239" name="マスの線 4"/>
             <p:cNvCxnSpPr/>
             <p:nvPr/>
           </p:nvCxnSpPr>
@@ -11993,7 +11958,7 @@
         </p:cxnSp>
         <p:cxnSp>
           <p:nvCxnSpPr>
-            <p:cNvPr id="241" name="マスの線 5"/>
+            <p:cNvPr id="240" name="マスの線 5"/>
             <p:cNvCxnSpPr/>
             <p:nvPr/>
           </p:nvCxnSpPr>
@@ -12029,7 +11994,7 @@
         </p:cxnSp>
         <p:cxnSp>
           <p:nvCxnSpPr>
-            <p:cNvPr id="242" name="マスの線 6"/>
+            <p:cNvPr id="241" name="マスの線 6"/>
             <p:cNvCxnSpPr/>
             <p:nvPr/>
           </p:nvCxnSpPr>
@@ -12065,7 +12030,7 @@
         </p:cxnSp>
         <p:cxnSp>
           <p:nvCxnSpPr>
-            <p:cNvPr id="243" name="マスの線 7"/>
+            <p:cNvPr id="242" name="マスの線 7"/>
             <p:cNvCxnSpPr/>
             <p:nvPr/>
           </p:nvCxnSpPr>
@@ -12101,7 +12066,7 @@
         </p:cxnSp>
         <p:cxnSp>
           <p:nvCxnSpPr>
-            <p:cNvPr id="244" name="マスの線 8"/>
+            <p:cNvPr id="243" name="マスの線 8"/>
             <p:cNvCxnSpPr/>
             <p:nvPr/>
           </p:nvCxnSpPr>
@@ -12137,7 +12102,7 @@
         </p:cxnSp>
         <p:cxnSp>
           <p:nvCxnSpPr>
-            <p:cNvPr id="245" name="マスの線 9"/>
+            <p:cNvPr id="244" name="マスの線 9"/>
             <p:cNvCxnSpPr/>
             <p:nvPr/>
           </p:nvCxnSpPr>
@@ -12173,7 +12138,7 @@
         </p:cxnSp>
         <p:cxnSp>
           <p:nvCxnSpPr>
-            <p:cNvPr id="246" name="マスの線 10"/>
+            <p:cNvPr id="245" name="マスの線 10"/>
             <p:cNvCxnSpPr/>
             <p:nvPr/>
           </p:nvCxnSpPr>
@@ -12209,7 +12174,7 @@
         </p:cxnSp>
         <p:cxnSp>
           <p:nvCxnSpPr>
-            <p:cNvPr id="247" name="マスの線 11"/>
+            <p:cNvPr id="246" name="マスの線 11"/>
             <p:cNvCxnSpPr/>
             <p:nvPr/>
           </p:nvCxnSpPr>
@@ -12245,7 +12210,7 @@
         </p:cxnSp>
         <p:cxnSp>
           <p:nvCxnSpPr>
-            <p:cNvPr id="248" name="マスの線 12"/>
+            <p:cNvPr id="247" name="マスの線 12"/>
             <p:cNvCxnSpPr/>
             <p:nvPr/>
           </p:nvCxnSpPr>
@@ -12281,7 +12246,7 @@
         </p:cxnSp>
         <p:cxnSp>
           <p:nvCxnSpPr>
-            <p:cNvPr id="249" name="マスの線 13"/>
+            <p:cNvPr id="248" name="マスの線 13"/>
             <p:cNvCxnSpPr/>
             <p:nvPr/>
           </p:nvCxnSpPr>
@@ -12317,7 +12282,7 @@
         </p:cxnSp>
         <p:cxnSp>
           <p:nvCxnSpPr>
-            <p:cNvPr id="250" name="マスの線 14"/>
+            <p:cNvPr id="249" name="マスの線 14"/>
             <p:cNvCxnSpPr/>
             <p:nvPr/>
           </p:nvCxnSpPr>
@@ -12353,7 +12318,7 @@
         </p:cxnSp>
         <p:cxnSp>
           <p:nvCxnSpPr>
-            <p:cNvPr id="251" name="マスの線 15"/>
+            <p:cNvPr id="250" name="マスの線 15"/>
             <p:cNvCxnSpPr/>
             <p:nvPr/>
           </p:nvCxnSpPr>
@@ -12389,7 +12354,7 @@
         </p:cxnSp>
         <p:cxnSp>
           <p:nvCxnSpPr>
-            <p:cNvPr id="252" name="マスの線 16"/>
+            <p:cNvPr id="251" name="マスの線 16"/>
             <p:cNvCxnSpPr/>
             <p:nvPr/>
           </p:nvCxnSpPr>
@@ -12425,7 +12390,7 @@
         </p:cxnSp>
         <p:cxnSp>
           <p:nvCxnSpPr>
-            <p:cNvPr id="253" name="マスの線 17"/>
+            <p:cNvPr id="252" name="マスの線 17"/>
             <p:cNvCxnSpPr/>
             <p:nvPr/>
           </p:nvCxnSpPr>
@@ -12461,7 +12426,7 @@
         </p:cxnSp>
         <p:cxnSp>
           <p:nvCxnSpPr>
-            <p:cNvPr id="254" name="マスの線 18"/>
+            <p:cNvPr id="253" name="マスの線 18"/>
             <p:cNvCxnSpPr/>
             <p:nvPr/>
           </p:nvCxnSpPr>
@@ -12497,7 +12462,7 @@
         </p:cxnSp>
         <p:cxnSp>
           <p:nvCxnSpPr>
-            <p:cNvPr id="255" name="マスの線 19"/>
+            <p:cNvPr id="254" name="マスの線 19"/>
             <p:cNvCxnSpPr/>
             <p:nvPr/>
           </p:nvCxnSpPr>
@@ -12533,7 +12498,7 @@
         </p:cxnSp>
         <p:cxnSp>
           <p:nvCxnSpPr>
-            <p:cNvPr id="256" name="マスの線 20"/>
+            <p:cNvPr id="255" name="マスの線 20"/>
             <p:cNvCxnSpPr/>
             <p:nvPr/>
           </p:nvCxnSpPr>
@@ -12569,7 +12534,7 @@
         </p:cxnSp>
         <p:cxnSp>
           <p:nvCxnSpPr>
-            <p:cNvPr id="257" name="マスの線 21"/>
+            <p:cNvPr id="256" name="マスの線 21"/>
             <p:cNvCxnSpPr/>
             <p:nvPr/>
           </p:nvCxnSpPr>
@@ -12606,7 +12571,7 @@
       </p:grpSp>
       <p:grpSp>
         <p:nvGrpSpPr>
-          <p:cNvPr id="258" name="12行目"/>
+          <p:cNvPr id="257" name="12行目"/>
           <p:cNvGrpSpPr/>
           <p:nvPr/>
         </p:nvGrpSpPr>
@@ -12620,7 +12585,7 @@
         </p:grpSpPr>
         <p:sp>
           <p:nvSpPr>
-            <p:cNvPr id="259" name="外わく"/>
+            <p:cNvPr id="258" name="外わく"/>
             <p:cNvSpPr/>
             <p:nvPr/>
           </p:nvSpPr>
@@ -12664,7 +12629,7 @@
         </p:sp>
         <p:cxnSp>
           <p:nvCxnSpPr>
-            <p:cNvPr id="260" name="マスの線 1"/>
+            <p:cNvPr id="259" name="マスの線 1"/>
             <p:cNvCxnSpPr/>
             <p:nvPr/>
           </p:nvCxnSpPr>
@@ -12700,7 +12665,7 @@
         </p:cxnSp>
         <p:cxnSp>
           <p:nvCxnSpPr>
-            <p:cNvPr id="261" name="マスの線 2"/>
+            <p:cNvPr id="260" name="マスの線 2"/>
             <p:cNvCxnSpPr/>
             <p:nvPr/>
           </p:nvCxnSpPr>
@@ -12736,7 +12701,7 @@
         </p:cxnSp>
         <p:cxnSp>
           <p:nvCxnSpPr>
-            <p:cNvPr id="262" name="マスの線 3"/>
+            <p:cNvPr id="261" name="マスの線 3"/>
             <p:cNvCxnSpPr/>
             <p:nvPr/>
           </p:nvCxnSpPr>
@@ -12772,7 +12737,7 @@
         </p:cxnSp>
         <p:cxnSp>
           <p:nvCxnSpPr>
-            <p:cNvPr id="263" name="マスの線 4"/>
+            <p:cNvPr id="262" name="マスの線 4"/>
             <p:cNvCxnSpPr/>
             <p:nvPr/>
           </p:nvCxnSpPr>
@@ -12808,7 +12773,7 @@
         </p:cxnSp>
         <p:cxnSp>
           <p:nvCxnSpPr>
-            <p:cNvPr id="264" name="マスの線 5"/>
+            <p:cNvPr id="263" name="マスの線 5"/>
             <p:cNvCxnSpPr/>
             <p:nvPr/>
           </p:nvCxnSpPr>
@@ -12844,7 +12809,7 @@
         </p:cxnSp>
         <p:cxnSp>
           <p:nvCxnSpPr>
-            <p:cNvPr id="265" name="マスの線 6"/>
+            <p:cNvPr id="264" name="マスの線 6"/>
             <p:cNvCxnSpPr/>
             <p:nvPr/>
           </p:nvCxnSpPr>
@@ -12880,7 +12845,7 @@
         </p:cxnSp>
         <p:cxnSp>
           <p:nvCxnSpPr>
-            <p:cNvPr id="266" name="マスの線 7"/>
+            <p:cNvPr id="265" name="マスの線 7"/>
             <p:cNvCxnSpPr/>
             <p:nvPr/>
           </p:nvCxnSpPr>
@@ -12916,7 +12881,7 @@
         </p:cxnSp>
         <p:cxnSp>
           <p:nvCxnSpPr>
-            <p:cNvPr id="267" name="マスの線 8"/>
+            <p:cNvPr id="266" name="マスの線 8"/>
             <p:cNvCxnSpPr/>
             <p:nvPr/>
           </p:nvCxnSpPr>
@@ -12952,7 +12917,7 @@
         </p:cxnSp>
         <p:cxnSp>
           <p:nvCxnSpPr>
-            <p:cNvPr id="268" name="マスの線 9"/>
+            <p:cNvPr id="267" name="マスの線 9"/>
             <p:cNvCxnSpPr/>
             <p:nvPr/>
           </p:nvCxnSpPr>
@@ -12988,7 +12953,7 @@
         </p:cxnSp>
         <p:cxnSp>
           <p:nvCxnSpPr>
-            <p:cNvPr id="269" name="マスの線 10"/>
+            <p:cNvPr id="268" name="マスの線 10"/>
             <p:cNvCxnSpPr/>
             <p:nvPr/>
           </p:nvCxnSpPr>
@@ -13024,7 +12989,7 @@
         </p:cxnSp>
         <p:cxnSp>
           <p:nvCxnSpPr>
-            <p:cNvPr id="270" name="マスの線 11"/>
+            <p:cNvPr id="269" name="マスの線 11"/>
             <p:cNvCxnSpPr/>
             <p:nvPr/>
           </p:nvCxnSpPr>
@@ -13060,7 +13025,7 @@
         </p:cxnSp>
         <p:cxnSp>
           <p:nvCxnSpPr>
-            <p:cNvPr id="271" name="マスの線 12"/>
+            <p:cNvPr id="270" name="マスの線 12"/>
             <p:cNvCxnSpPr/>
             <p:nvPr/>
           </p:nvCxnSpPr>
@@ -13096,7 +13061,7 @@
         </p:cxnSp>
         <p:cxnSp>
           <p:nvCxnSpPr>
-            <p:cNvPr id="272" name="マスの線 13"/>
+            <p:cNvPr id="271" name="マスの線 13"/>
             <p:cNvCxnSpPr/>
             <p:nvPr/>
           </p:nvCxnSpPr>
@@ -13132,7 +13097,7 @@
         </p:cxnSp>
         <p:cxnSp>
           <p:nvCxnSpPr>
-            <p:cNvPr id="273" name="マスの線 14"/>
+            <p:cNvPr id="272" name="マスの線 14"/>
             <p:cNvCxnSpPr/>
             <p:nvPr/>
           </p:nvCxnSpPr>
@@ -13168,7 +13133,7 @@
         </p:cxnSp>
         <p:cxnSp>
           <p:nvCxnSpPr>
-            <p:cNvPr id="274" name="マスの線 15"/>
+            <p:cNvPr id="273" name="マスの線 15"/>
             <p:cNvCxnSpPr/>
             <p:nvPr/>
           </p:nvCxnSpPr>
@@ -13204,7 +13169,7 @@
         </p:cxnSp>
         <p:cxnSp>
           <p:nvCxnSpPr>
-            <p:cNvPr id="275" name="マスの線 16"/>
+            <p:cNvPr id="274" name="マスの線 16"/>
             <p:cNvCxnSpPr/>
             <p:nvPr/>
           </p:nvCxnSpPr>
@@ -13240,7 +13205,7 @@
         </p:cxnSp>
         <p:cxnSp>
           <p:nvCxnSpPr>
-            <p:cNvPr id="276" name="マスの線 17"/>
+            <p:cNvPr id="275" name="マスの線 17"/>
             <p:cNvCxnSpPr/>
             <p:nvPr/>
           </p:nvCxnSpPr>
@@ -13276,7 +13241,7 @@
         </p:cxnSp>
         <p:cxnSp>
           <p:nvCxnSpPr>
-            <p:cNvPr id="277" name="マスの線 18"/>
+            <p:cNvPr id="276" name="マスの線 18"/>
             <p:cNvCxnSpPr/>
             <p:nvPr/>
           </p:nvCxnSpPr>
@@ -13312,7 +13277,7 @@
         </p:cxnSp>
         <p:cxnSp>
           <p:nvCxnSpPr>
-            <p:cNvPr id="278" name="マスの線 19"/>
+            <p:cNvPr id="277" name="マスの線 19"/>
             <p:cNvCxnSpPr/>
             <p:nvPr/>
           </p:nvCxnSpPr>
@@ -13348,7 +13313,7 @@
         </p:cxnSp>
         <p:cxnSp>
           <p:nvCxnSpPr>
-            <p:cNvPr id="279" name="マスの線 20"/>
+            <p:cNvPr id="278" name="マスの線 20"/>
             <p:cNvCxnSpPr/>
             <p:nvPr/>
           </p:nvCxnSpPr>
@@ -13384,7 +13349,7 @@
         </p:cxnSp>
         <p:cxnSp>
           <p:nvCxnSpPr>
-            <p:cNvPr id="280" name="マスの線 21"/>
+            <p:cNvPr id="279" name="マスの線 21"/>
             <p:cNvCxnSpPr/>
             <p:nvPr/>
           </p:nvCxnSpPr>
@@ -13421,7 +13386,7 @@
       </p:grpSp>
       <p:grpSp>
         <p:nvGrpSpPr>
-          <p:cNvPr id="281" name="13行目"/>
+          <p:cNvPr id="280" name="13行目"/>
           <p:cNvGrpSpPr/>
           <p:nvPr/>
         </p:nvGrpSpPr>
@@ -13435,7 +13400,7 @@
         </p:grpSpPr>
         <p:sp>
           <p:nvSpPr>
-            <p:cNvPr id="282" name="外わく"/>
+            <p:cNvPr id="281" name="外わく"/>
             <p:cNvSpPr/>
             <p:nvPr/>
           </p:nvSpPr>
@@ -13479,7 +13444,7 @@
         </p:sp>
         <p:cxnSp>
           <p:nvCxnSpPr>
-            <p:cNvPr id="283" name="マスの線 1"/>
+            <p:cNvPr id="282" name="マスの線 1"/>
             <p:cNvCxnSpPr/>
             <p:nvPr/>
           </p:nvCxnSpPr>
@@ -13515,7 +13480,7 @@
         </p:cxnSp>
         <p:cxnSp>
           <p:nvCxnSpPr>
-            <p:cNvPr id="284" name="マスの線 2"/>
+            <p:cNvPr id="283" name="マスの線 2"/>
             <p:cNvCxnSpPr/>
             <p:nvPr/>
           </p:nvCxnSpPr>
@@ -13551,7 +13516,7 @@
         </p:cxnSp>
         <p:cxnSp>
           <p:nvCxnSpPr>
-            <p:cNvPr id="285" name="マスの線 3"/>
+            <p:cNvPr id="284" name="マスの線 3"/>
             <p:cNvCxnSpPr/>
             <p:nvPr/>
           </p:nvCxnSpPr>
@@ -13587,7 +13552,7 @@
         </p:cxnSp>
         <p:cxnSp>
           <p:nvCxnSpPr>
-            <p:cNvPr id="286" name="マスの線 4"/>
+            <p:cNvPr id="285" name="マスの線 4"/>
             <p:cNvCxnSpPr/>
             <p:nvPr/>
           </p:nvCxnSpPr>
@@ -13623,7 +13588,7 @@
         </p:cxnSp>
         <p:cxnSp>
           <p:nvCxnSpPr>
-            <p:cNvPr id="287" name="マスの線 5"/>
+            <p:cNvPr id="286" name="マスの線 5"/>
             <p:cNvCxnSpPr/>
             <p:nvPr/>
           </p:nvCxnSpPr>
@@ -13659,7 +13624,7 @@
         </p:cxnSp>
         <p:cxnSp>
           <p:nvCxnSpPr>
-            <p:cNvPr id="288" name="マスの線 6"/>
+            <p:cNvPr id="287" name="マスの線 6"/>
             <p:cNvCxnSpPr/>
             <p:nvPr/>
           </p:nvCxnSpPr>
@@ -13695,7 +13660,7 @@
         </p:cxnSp>
         <p:cxnSp>
           <p:nvCxnSpPr>
-            <p:cNvPr id="289" name="マスの線 7"/>
+            <p:cNvPr id="288" name="マスの線 7"/>
             <p:cNvCxnSpPr/>
             <p:nvPr/>
           </p:nvCxnSpPr>
@@ -13731,7 +13696,7 @@
         </p:cxnSp>
         <p:cxnSp>
           <p:nvCxnSpPr>
-            <p:cNvPr id="290" name="マスの線 8"/>
+            <p:cNvPr id="289" name="マスの線 8"/>
             <p:cNvCxnSpPr/>
             <p:nvPr/>
           </p:nvCxnSpPr>
@@ -13767,7 +13732,7 @@
         </p:cxnSp>
         <p:cxnSp>
           <p:nvCxnSpPr>
-            <p:cNvPr id="291" name="マスの線 9"/>
+            <p:cNvPr id="290" name="マスの線 9"/>
             <p:cNvCxnSpPr/>
             <p:nvPr/>
           </p:nvCxnSpPr>
@@ -13803,7 +13768,7 @@
         </p:cxnSp>
         <p:cxnSp>
           <p:nvCxnSpPr>
-            <p:cNvPr id="292" name="マスの線 10"/>
+            <p:cNvPr id="291" name="マスの線 10"/>
             <p:cNvCxnSpPr/>
             <p:nvPr/>
           </p:nvCxnSpPr>
@@ -13839,7 +13804,7 @@
         </p:cxnSp>
         <p:cxnSp>
           <p:nvCxnSpPr>
-            <p:cNvPr id="293" name="マスの線 11"/>
+            <p:cNvPr id="292" name="マスの線 11"/>
             <p:cNvCxnSpPr/>
             <p:nvPr/>
           </p:nvCxnSpPr>
@@ -13875,7 +13840,7 @@
         </p:cxnSp>
         <p:cxnSp>
           <p:nvCxnSpPr>
-            <p:cNvPr id="294" name="マスの線 12"/>
+            <p:cNvPr id="293" name="マスの線 12"/>
             <p:cNvCxnSpPr/>
             <p:nvPr/>
           </p:nvCxnSpPr>
@@ -13911,7 +13876,7 @@
         </p:cxnSp>
         <p:cxnSp>
           <p:nvCxnSpPr>
-            <p:cNvPr id="295" name="マスの線 13"/>
+            <p:cNvPr id="294" name="マスの線 13"/>
             <p:cNvCxnSpPr/>
             <p:nvPr/>
           </p:nvCxnSpPr>
@@ -13947,7 +13912,7 @@
         </p:cxnSp>
         <p:cxnSp>
           <p:nvCxnSpPr>
-            <p:cNvPr id="296" name="マスの線 14"/>
+            <p:cNvPr id="295" name="マスの線 14"/>
             <p:cNvCxnSpPr/>
             <p:nvPr/>
           </p:nvCxnSpPr>
@@ -13983,7 +13948,7 @@
         </p:cxnSp>
         <p:cxnSp>
           <p:nvCxnSpPr>
-            <p:cNvPr id="297" name="マスの線 15"/>
+            <p:cNvPr id="296" name="マスの線 15"/>
             <p:cNvCxnSpPr/>
             <p:nvPr/>
           </p:nvCxnSpPr>
@@ -14019,7 +13984,7 @@
         </p:cxnSp>
         <p:cxnSp>
           <p:nvCxnSpPr>
-            <p:cNvPr id="298" name="マスの線 16"/>
+            <p:cNvPr id="297" name="マスの線 16"/>
             <p:cNvCxnSpPr/>
             <p:nvPr/>
           </p:nvCxnSpPr>
@@ -14055,7 +14020,7 @@
         </p:cxnSp>
         <p:cxnSp>
           <p:nvCxnSpPr>
-            <p:cNvPr id="299" name="マスの線 17"/>
+            <p:cNvPr id="298" name="マスの線 17"/>
             <p:cNvCxnSpPr/>
             <p:nvPr/>
           </p:nvCxnSpPr>
@@ -14091,7 +14056,7 @@
         </p:cxnSp>
         <p:cxnSp>
           <p:nvCxnSpPr>
-            <p:cNvPr id="300" name="マスの線 18"/>
+            <p:cNvPr id="299" name="マスの線 18"/>
             <p:cNvCxnSpPr/>
             <p:nvPr/>
           </p:nvCxnSpPr>
@@ -14127,7 +14092,7 @@
         </p:cxnSp>
         <p:cxnSp>
           <p:nvCxnSpPr>
-            <p:cNvPr id="301" name="マスの線 19"/>
+            <p:cNvPr id="300" name="マスの線 19"/>
             <p:cNvCxnSpPr/>
             <p:nvPr/>
           </p:nvCxnSpPr>
@@ -14163,7 +14128,7 @@
         </p:cxnSp>
         <p:cxnSp>
           <p:nvCxnSpPr>
-            <p:cNvPr id="302" name="マスの線 20"/>
+            <p:cNvPr id="301" name="マスの線 20"/>
             <p:cNvCxnSpPr/>
             <p:nvPr/>
           </p:nvCxnSpPr>
@@ -14199,7 +14164,7 @@
         </p:cxnSp>
         <p:cxnSp>
           <p:nvCxnSpPr>
-            <p:cNvPr id="303" name="マスの線 21"/>
+            <p:cNvPr id="302" name="マスの線 21"/>
             <p:cNvCxnSpPr/>
             <p:nvPr/>
           </p:nvCxnSpPr>
@@ -14236,7 +14201,7 @@
       </p:grpSp>
       <p:grpSp>
         <p:nvGrpSpPr>
-          <p:cNvPr id="304" name="14行目"/>
+          <p:cNvPr id="303" name="14行目"/>
           <p:cNvGrpSpPr/>
           <p:nvPr/>
         </p:nvGrpSpPr>
@@ -14250,7 +14215,7 @@
         </p:grpSpPr>
         <p:sp>
           <p:nvSpPr>
-            <p:cNvPr id="305" name="外わく"/>
+            <p:cNvPr id="304" name="外わく"/>
             <p:cNvSpPr/>
             <p:nvPr/>
           </p:nvSpPr>
@@ -14294,7 +14259,7 @@
         </p:sp>
         <p:cxnSp>
           <p:nvCxnSpPr>
-            <p:cNvPr id="306" name="マスの線 1"/>
+            <p:cNvPr id="305" name="マスの線 1"/>
             <p:cNvCxnSpPr/>
             <p:nvPr/>
           </p:nvCxnSpPr>
@@ -14330,7 +14295,7 @@
         </p:cxnSp>
         <p:cxnSp>
           <p:nvCxnSpPr>
-            <p:cNvPr id="307" name="マスの線 2"/>
+            <p:cNvPr id="306" name="マスの線 2"/>
             <p:cNvCxnSpPr/>
             <p:nvPr/>
           </p:nvCxnSpPr>
@@ -14366,7 +14331,7 @@
         </p:cxnSp>
         <p:cxnSp>
           <p:nvCxnSpPr>
-            <p:cNvPr id="308" name="マスの線 3"/>
+            <p:cNvPr id="307" name="マスの線 3"/>
             <p:cNvCxnSpPr/>
             <p:nvPr/>
           </p:nvCxnSpPr>
@@ -14402,7 +14367,7 @@
         </p:cxnSp>
         <p:cxnSp>
           <p:nvCxnSpPr>
-            <p:cNvPr id="309" name="マスの線 4"/>
+            <p:cNvPr id="308" name="マスの線 4"/>
             <p:cNvCxnSpPr/>
             <p:nvPr/>
           </p:nvCxnSpPr>
@@ -14438,7 +14403,7 @@
         </p:cxnSp>
         <p:cxnSp>
           <p:nvCxnSpPr>
-            <p:cNvPr id="310" name="マスの線 5"/>
+            <p:cNvPr id="309" name="マスの線 5"/>
             <p:cNvCxnSpPr/>
             <p:nvPr/>
           </p:nvCxnSpPr>
@@ -14474,7 +14439,7 @@
         </p:cxnSp>
         <p:cxnSp>
           <p:nvCxnSpPr>
-            <p:cNvPr id="311" name="マスの線 6"/>
+            <p:cNvPr id="310" name="マスの線 6"/>
             <p:cNvCxnSpPr/>
             <p:nvPr/>
           </p:nvCxnSpPr>
@@ -14510,7 +14475,7 @@
         </p:cxnSp>
         <p:cxnSp>
           <p:nvCxnSpPr>
-            <p:cNvPr id="312" name="マスの線 7"/>
+            <p:cNvPr id="311" name="マスの線 7"/>
             <p:cNvCxnSpPr/>
             <p:nvPr/>
           </p:nvCxnSpPr>
@@ -14546,7 +14511,7 @@
         </p:cxnSp>
         <p:cxnSp>
           <p:nvCxnSpPr>
-            <p:cNvPr id="313" name="マスの線 8"/>
+            <p:cNvPr id="312" name="マスの線 8"/>
             <p:cNvCxnSpPr/>
             <p:nvPr/>
           </p:nvCxnSpPr>
@@ -14582,7 +14547,7 @@
         </p:cxnSp>
         <p:cxnSp>
           <p:nvCxnSpPr>
-            <p:cNvPr id="314" name="マスの線 9"/>
+            <p:cNvPr id="313" name="マスの線 9"/>
             <p:cNvCxnSpPr/>
             <p:nvPr/>
           </p:nvCxnSpPr>
@@ -14618,7 +14583,7 @@
         </p:cxnSp>
         <p:cxnSp>
           <p:nvCxnSpPr>
-            <p:cNvPr id="315" name="マスの線 10"/>
+            <p:cNvPr id="314" name="マスの線 10"/>
             <p:cNvCxnSpPr/>
             <p:nvPr/>
           </p:nvCxnSpPr>
@@ -14654,7 +14619,7 @@
         </p:cxnSp>
         <p:cxnSp>
           <p:nvCxnSpPr>
-            <p:cNvPr id="316" name="マスの線 11"/>
+            <p:cNvPr id="315" name="マスの線 11"/>
             <p:cNvCxnSpPr/>
             <p:nvPr/>
           </p:nvCxnSpPr>
@@ -14690,7 +14655,7 @@
         </p:cxnSp>
         <p:cxnSp>
           <p:nvCxnSpPr>
-            <p:cNvPr id="317" name="マスの線 12"/>
+            <p:cNvPr id="316" name="マスの線 12"/>
             <p:cNvCxnSpPr/>
             <p:nvPr/>
           </p:nvCxnSpPr>
@@ -14726,7 +14691,7 @@
         </p:cxnSp>
         <p:cxnSp>
           <p:nvCxnSpPr>
-            <p:cNvPr id="318" name="マスの線 13"/>
+            <p:cNvPr id="317" name="マスの線 13"/>
             <p:cNvCxnSpPr/>
             <p:nvPr/>
           </p:nvCxnSpPr>
@@ -14762,7 +14727,7 @@
         </p:cxnSp>
         <p:cxnSp>
           <p:nvCxnSpPr>
-            <p:cNvPr id="319" name="マスの線 14"/>
+            <p:cNvPr id="318" name="マスの線 14"/>
             <p:cNvCxnSpPr/>
             <p:nvPr/>
           </p:nvCxnSpPr>
@@ -14798,7 +14763,7 @@
         </p:cxnSp>
         <p:cxnSp>
           <p:nvCxnSpPr>
-            <p:cNvPr id="320" name="マスの線 15"/>
+            <p:cNvPr id="319" name="マスの線 15"/>
             <p:cNvCxnSpPr/>
             <p:nvPr/>
           </p:nvCxnSpPr>
@@ -14834,7 +14799,7 @@
         </p:cxnSp>
         <p:cxnSp>
           <p:nvCxnSpPr>
-            <p:cNvPr id="321" name="マスの線 16"/>
+            <p:cNvPr id="320" name="マスの線 16"/>
             <p:cNvCxnSpPr/>
             <p:nvPr/>
           </p:nvCxnSpPr>
@@ -14870,7 +14835,7 @@
         </p:cxnSp>
         <p:cxnSp>
           <p:nvCxnSpPr>
-            <p:cNvPr id="322" name="マスの線 17"/>
+            <p:cNvPr id="321" name="マスの線 17"/>
             <p:cNvCxnSpPr/>
             <p:nvPr/>
           </p:nvCxnSpPr>
@@ -14906,7 +14871,7 @@
         </p:cxnSp>
         <p:cxnSp>
           <p:nvCxnSpPr>
-            <p:cNvPr id="323" name="マスの線 18"/>
+            <p:cNvPr id="322" name="マスの線 18"/>
             <p:cNvCxnSpPr/>
             <p:nvPr/>
           </p:nvCxnSpPr>
@@ -14942,7 +14907,7 @@
         </p:cxnSp>
         <p:cxnSp>
           <p:nvCxnSpPr>
-            <p:cNvPr id="324" name="マスの線 19"/>
+            <p:cNvPr id="323" name="マスの線 19"/>
             <p:cNvCxnSpPr/>
             <p:nvPr/>
           </p:nvCxnSpPr>
@@ -14978,7 +14943,7 @@
         </p:cxnSp>
         <p:cxnSp>
           <p:nvCxnSpPr>
-            <p:cNvPr id="325" name="マスの線 20"/>
+            <p:cNvPr id="324" name="マスの線 20"/>
             <p:cNvCxnSpPr/>
             <p:nvPr/>
           </p:nvCxnSpPr>
@@ -15014,7 +14979,7 @@
         </p:cxnSp>
         <p:cxnSp>
           <p:nvCxnSpPr>
-            <p:cNvPr id="326" name="マスの線 21"/>
+            <p:cNvPr id="325" name="マスの線 21"/>
             <p:cNvCxnSpPr/>
             <p:nvPr/>
           </p:nvCxnSpPr>
@@ -15051,7 +15016,7 @@
       </p:grpSp>
       <p:grpSp>
         <p:nvGrpSpPr>
-          <p:cNvPr id="327" name="15行目"/>
+          <p:cNvPr id="326" name="15行目"/>
           <p:cNvGrpSpPr/>
           <p:nvPr/>
         </p:nvGrpSpPr>
@@ -15065,7 +15030,7 @@
         </p:grpSpPr>
         <p:sp>
           <p:nvSpPr>
-            <p:cNvPr id="328" name="外わく"/>
+            <p:cNvPr id="327" name="外わく"/>
             <p:cNvSpPr/>
             <p:nvPr/>
           </p:nvSpPr>
@@ -15109,7 +15074,7 @@
         </p:sp>
         <p:cxnSp>
           <p:nvCxnSpPr>
-            <p:cNvPr id="329" name="マスの線 1"/>
+            <p:cNvPr id="328" name="マスの線 1"/>
             <p:cNvCxnSpPr/>
             <p:nvPr/>
           </p:nvCxnSpPr>
@@ -15145,7 +15110,7 @@
         </p:cxnSp>
         <p:cxnSp>
           <p:nvCxnSpPr>
-            <p:cNvPr id="330" name="マスの線 2"/>
+            <p:cNvPr id="329" name="マスの線 2"/>
             <p:cNvCxnSpPr/>
             <p:nvPr/>
           </p:nvCxnSpPr>
@@ -15181,7 +15146,7 @@
         </p:cxnSp>
         <p:cxnSp>
           <p:nvCxnSpPr>
-            <p:cNvPr id="331" name="マスの線 3"/>
+            <p:cNvPr id="330" name="マスの線 3"/>
             <p:cNvCxnSpPr/>
             <p:nvPr/>
           </p:nvCxnSpPr>
@@ -15217,7 +15182,7 @@
         </p:cxnSp>
         <p:cxnSp>
           <p:nvCxnSpPr>
-            <p:cNvPr id="332" name="マスの線 4"/>
+            <p:cNvPr id="331" name="マスの線 4"/>
             <p:cNvCxnSpPr/>
             <p:nvPr/>
           </p:nvCxnSpPr>
@@ -15253,7 +15218,7 @@
         </p:cxnSp>
         <p:cxnSp>
           <p:nvCxnSpPr>
-            <p:cNvPr id="333" name="マスの線 5"/>
+            <p:cNvPr id="332" name="マスの線 5"/>
             <p:cNvCxnSpPr/>
             <p:nvPr/>
           </p:nvCxnSpPr>
@@ -15289,7 +15254,7 @@
         </p:cxnSp>
         <p:cxnSp>
           <p:nvCxnSpPr>
-            <p:cNvPr id="334" name="マスの線 6"/>
+            <p:cNvPr id="333" name="マスの線 6"/>
             <p:cNvCxnSpPr/>
             <p:nvPr/>
           </p:nvCxnSpPr>
@@ -15325,7 +15290,7 @@
         </p:cxnSp>
         <p:cxnSp>
           <p:nvCxnSpPr>
-            <p:cNvPr id="335" name="マスの線 7"/>
+            <p:cNvPr id="334" name="マスの線 7"/>
             <p:cNvCxnSpPr/>
             <p:nvPr/>
           </p:nvCxnSpPr>
@@ -15361,7 +15326,7 @@
         </p:cxnSp>
         <p:cxnSp>
           <p:nvCxnSpPr>
-            <p:cNvPr id="336" name="マスの線 8"/>
+            <p:cNvPr id="335" name="マスの線 8"/>
             <p:cNvCxnSpPr/>
             <p:nvPr/>
           </p:nvCxnSpPr>
@@ -15397,7 +15362,7 @@
         </p:cxnSp>
         <p:cxnSp>
           <p:nvCxnSpPr>
-            <p:cNvPr id="337" name="マスの線 9"/>
+            <p:cNvPr id="336" name="マスの線 9"/>
             <p:cNvCxnSpPr/>
             <p:nvPr/>
           </p:nvCxnSpPr>
@@ -15433,7 +15398,7 @@
         </p:cxnSp>
         <p:cxnSp>
           <p:nvCxnSpPr>
-            <p:cNvPr id="338" name="マスの線 10"/>
+            <p:cNvPr id="337" name="マスの線 10"/>
             <p:cNvCxnSpPr/>
             <p:nvPr/>
           </p:nvCxnSpPr>
@@ -15469,7 +15434,7 @@
         </p:cxnSp>
         <p:cxnSp>
           <p:nvCxnSpPr>
-            <p:cNvPr id="339" name="マスの線 11"/>
+            <p:cNvPr id="338" name="マスの線 11"/>
             <p:cNvCxnSpPr/>
             <p:nvPr/>
           </p:nvCxnSpPr>
@@ -15505,7 +15470,7 @@
         </p:cxnSp>
         <p:cxnSp>
           <p:nvCxnSpPr>
-            <p:cNvPr id="340" name="マスの線 12"/>
+            <p:cNvPr id="339" name="マスの線 12"/>
             <p:cNvCxnSpPr/>
             <p:nvPr/>
           </p:nvCxnSpPr>
@@ -15541,7 +15506,7 @@
         </p:cxnSp>
         <p:cxnSp>
           <p:nvCxnSpPr>
-            <p:cNvPr id="341" name="マスの線 13"/>
+            <p:cNvPr id="340" name="マスの線 13"/>
             <p:cNvCxnSpPr/>
             <p:nvPr/>
           </p:nvCxnSpPr>
@@ -15577,7 +15542,7 @@
         </p:cxnSp>
         <p:cxnSp>
           <p:nvCxnSpPr>
-            <p:cNvPr id="342" name="マスの線 14"/>
+            <p:cNvPr id="341" name="マスの線 14"/>
             <p:cNvCxnSpPr/>
             <p:nvPr/>
           </p:nvCxnSpPr>
@@ -15613,7 +15578,7 @@
         </p:cxnSp>
         <p:cxnSp>
           <p:nvCxnSpPr>
-            <p:cNvPr id="343" name="マスの線 15"/>
+            <p:cNvPr id="342" name="マスの線 15"/>
             <p:cNvCxnSpPr/>
             <p:nvPr/>
           </p:nvCxnSpPr>
@@ -15649,7 +15614,7 @@
         </p:cxnSp>
         <p:cxnSp>
           <p:nvCxnSpPr>
-            <p:cNvPr id="344" name="マスの線 16"/>
+            <p:cNvPr id="343" name="マスの線 16"/>
             <p:cNvCxnSpPr/>
             <p:nvPr/>
           </p:nvCxnSpPr>
@@ -15685,7 +15650,7 @@
         </p:cxnSp>
         <p:cxnSp>
           <p:nvCxnSpPr>
-            <p:cNvPr id="345" name="マスの線 17"/>
+            <p:cNvPr id="344" name="マスの線 17"/>
             <p:cNvCxnSpPr/>
             <p:nvPr/>
           </p:nvCxnSpPr>
@@ -15721,7 +15686,7 @@
         </p:cxnSp>
         <p:cxnSp>
           <p:nvCxnSpPr>
-            <p:cNvPr id="346" name="マスの線 18"/>
+            <p:cNvPr id="345" name="マスの線 18"/>
             <p:cNvCxnSpPr/>
             <p:nvPr/>
           </p:nvCxnSpPr>
@@ -15757,7 +15722,7 @@
         </p:cxnSp>
         <p:cxnSp>
           <p:nvCxnSpPr>
-            <p:cNvPr id="347" name="マスの線 19"/>
+            <p:cNvPr id="346" name="マスの線 19"/>
             <p:cNvCxnSpPr/>
             <p:nvPr/>
           </p:nvCxnSpPr>
@@ -15793,7 +15758,7 @@
         </p:cxnSp>
         <p:cxnSp>
           <p:nvCxnSpPr>
-            <p:cNvPr id="348" name="マスの線 20"/>
+            <p:cNvPr id="347" name="マスの線 20"/>
             <p:cNvCxnSpPr/>
             <p:nvPr/>
           </p:nvCxnSpPr>
@@ -15829,7 +15794,7 @@
         </p:cxnSp>
         <p:cxnSp>
           <p:nvCxnSpPr>
-            <p:cNvPr id="349" name="マスの線 21"/>
+            <p:cNvPr id="348" name="マスの線 21"/>
             <p:cNvCxnSpPr/>
             <p:nvPr/>
           </p:nvCxnSpPr>
@@ -15866,7 +15831,7 @@
       </p:grpSp>
       <p:grpSp>
         <p:nvGrpSpPr>
-          <p:cNvPr id="350" name="16行目"/>
+          <p:cNvPr id="349" name="16行目"/>
           <p:cNvGrpSpPr/>
           <p:nvPr/>
         </p:nvGrpSpPr>
@@ -15880,7 +15845,7 @@
         </p:grpSpPr>
         <p:sp>
           <p:nvSpPr>
-            <p:cNvPr id="351" name="外わく"/>
+            <p:cNvPr id="350" name="外わく"/>
             <p:cNvSpPr/>
             <p:nvPr/>
           </p:nvSpPr>
@@ -15924,7 +15889,7 @@
         </p:sp>
         <p:cxnSp>
           <p:nvCxnSpPr>
-            <p:cNvPr id="352" name="マスの線 1"/>
+            <p:cNvPr id="351" name="マスの線 1"/>
             <p:cNvCxnSpPr/>
             <p:nvPr/>
           </p:nvCxnSpPr>
@@ -15960,7 +15925,7 @@
         </p:cxnSp>
         <p:cxnSp>
           <p:nvCxnSpPr>
-            <p:cNvPr id="353" name="マスの線 2"/>
+            <p:cNvPr id="352" name="マスの線 2"/>
             <p:cNvCxnSpPr/>
             <p:nvPr/>
           </p:nvCxnSpPr>
@@ -15996,7 +15961,7 @@
         </p:cxnSp>
         <p:cxnSp>
           <p:nvCxnSpPr>
-            <p:cNvPr id="354" name="マスの線 3"/>
+            <p:cNvPr id="353" name="マスの線 3"/>
             <p:cNvCxnSpPr/>
             <p:nvPr/>
           </p:nvCxnSpPr>
@@ -16032,7 +15997,7 @@
         </p:cxnSp>
         <p:cxnSp>
           <p:nvCxnSpPr>
-            <p:cNvPr id="355" name="マスの線 4"/>
+            <p:cNvPr id="354" name="マスの線 4"/>
             <p:cNvCxnSpPr/>
             <p:nvPr/>
           </p:nvCxnSpPr>
@@ -16068,7 +16033,7 @@
         </p:cxnSp>
         <p:cxnSp>
           <p:nvCxnSpPr>
-            <p:cNvPr id="356" name="マスの線 5"/>
+            <p:cNvPr id="355" name="マスの線 5"/>
             <p:cNvCxnSpPr/>
             <p:nvPr/>
           </p:nvCxnSpPr>
@@ -16104,7 +16069,7 @@
         </p:cxnSp>
         <p:cxnSp>
           <p:nvCxnSpPr>
-            <p:cNvPr id="357" name="マスの線 6"/>
+            <p:cNvPr id="356" name="マスの線 6"/>
             <p:cNvCxnSpPr/>
             <p:nvPr/>
           </p:nvCxnSpPr>
@@ -16140,7 +16105,7 @@
         </p:cxnSp>
         <p:cxnSp>
           <p:nvCxnSpPr>
-            <p:cNvPr id="358" name="マスの線 7"/>
+            <p:cNvPr id="357" name="マスの線 7"/>
             <p:cNvCxnSpPr/>
             <p:nvPr/>
           </p:nvCxnSpPr>
@@ -16176,7 +16141,7 @@
         </p:cxnSp>
         <p:cxnSp>
           <p:nvCxnSpPr>
-            <p:cNvPr id="359" name="マスの線 8"/>
+            <p:cNvPr id="358" name="マスの線 8"/>
             <p:cNvCxnSpPr/>
             <p:nvPr/>
           </p:nvCxnSpPr>
@@ -16212,7 +16177,7 @@
         </p:cxnSp>
         <p:cxnSp>
           <p:nvCxnSpPr>
-            <p:cNvPr id="360" name="マスの線 9"/>
+            <p:cNvPr id="359" name="マスの線 9"/>
             <p:cNvCxnSpPr/>
             <p:nvPr/>
           </p:nvCxnSpPr>
@@ -16248,7 +16213,7 @@
         </p:cxnSp>
         <p:cxnSp>
           <p:nvCxnSpPr>
-            <p:cNvPr id="361" name="マスの線 10"/>
+            <p:cNvPr id="360" name="マスの線 10"/>
             <p:cNvCxnSpPr/>
             <p:nvPr/>
           </p:nvCxnSpPr>
@@ -16284,7 +16249,7 @@
         </p:cxnSp>
         <p:cxnSp>
           <p:nvCxnSpPr>
-            <p:cNvPr id="362" name="マスの線 11"/>
+            <p:cNvPr id="361" name="マスの線 11"/>
             <p:cNvCxnSpPr/>
             <p:nvPr/>
           </p:nvCxnSpPr>
@@ -16320,7 +16285,7 @@
         </p:cxnSp>
         <p:cxnSp>
           <p:nvCxnSpPr>
-            <p:cNvPr id="363" name="マスの線 12"/>
+            <p:cNvPr id="362" name="マスの線 12"/>
             <p:cNvCxnSpPr/>
             <p:nvPr/>
           </p:nvCxnSpPr>
@@ -16356,7 +16321,7 @@
         </p:cxnSp>
         <p:cxnSp>
           <p:nvCxnSpPr>
-            <p:cNvPr id="364" name="マスの線 13"/>
+            <p:cNvPr id="363" name="マスの線 13"/>
             <p:cNvCxnSpPr/>
             <p:nvPr/>
           </p:nvCxnSpPr>
@@ -16392,7 +16357,7 @@
         </p:cxnSp>
         <p:cxnSp>
           <p:nvCxnSpPr>
-            <p:cNvPr id="365" name="マスの線 14"/>
+            <p:cNvPr id="364" name="マスの線 14"/>
             <p:cNvCxnSpPr/>
             <p:nvPr/>
           </p:nvCxnSpPr>
@@ -16428,7 +16393,7 @@
         </p:cxnSp>
         <p:cxnSp>
           <p:nvCxnSpPr>
-            <p:cNvPr id="366" name="マスの線 15"/>
+            <p:cNvPr id="365" name="マスの線 15"/>
             <p:cNvCxnSpPr/>
             <p:nvPr/>
           </p:nvCxnSpPr>
@@ -16464,7 +16429,7 @@
         </p:cxnSp>
         <p:cxnSp>
           <p:nvCxnSpPr>
-            <p:cNvPr id="367" name="マスの線 16"/>
+            <p:cNvPr id="366" name="マスの線 16"/>
             <p:cNvCxnSpPr/>
             <p:nvPr/>
           </p:nvCxnSpPr>
@@ -16500,7 +16465,7 @@
         </p:cxnSp>
         <p:cxnSp>
           <p:nvCxnSpPr>
-            <p:cNvPr id="368" name="マスの線 17"/>
+            <p:cNvPr id="367" name="マスの線 17"/>
             <p:cNvCxnSpPr/>
             <p:nvPr/>
           </p:nvCxnSpPr>
@@ -16536,7 +16501,7 @@
         </p:cxnSp>
         <p:cxnSp>
           <p:nvCxnSpPr>
-            <p:cNvPr id="369" name="マスの線 18"/>
+            <p:cNvPr id="368" name="マスの線 18"/>
             <p:cNvCxnSpPr/>
             <p:nvPr/>
           </p:nvCxnSpPr>
@@ -16572,7 +16537,7 @@
         </p:cxnSp>
         <p:cxnSp>
           <p:nvCxnSpPr>
-            <p:cNvPr id="370" name="マスの線 19"/>
+            <p:cNvPr id="369" name="マスの線 19"/>
             <p:cNvCxnSpPr/>
             <p:nvPr/>
           </p:nvCxnSpPr>
@@ -16608,7 +16573,7 @@
         </p:cxnSp>
         <p:cxnSp>
           <p:nvCxnSpPr>
-            <p:cNvPr id="371" name="マスの線 20"/>
+            <p:cNvPr id="370" name="マスの線 20"/>
             <p:cNvCxnSpPr/>
             <p:nvPr/>
           </p:nvCxnSpPr>
@@ -16644,7 +16609,7 @@
         </p:cxnSp>
         <p:cxnSp>
           <p:nvCxnSpPr>
-            <p:cNvPr id="372" name="マスの線 21"/>
+            <p:cNvPr id="371" name="マスの線 21"/>
             <p:cNvCxnSpPr/>
             <p:nvPr/>
           </p:nvCxnSpPr>
@@ -16681,7 +16646,7 @@
       </p:grpSp>
       <p:grpSp>
         <p:nvGrpSpPr>
-          <p:cNvPr id="373" name="17行目"/>
+          <p:cNvPr id="372" name="17行目"/>
           <p:cNvGrpSpPr/>
           <p:nvPr/>
         </p:nvGrpSpPr>
@@ -16695,7 +16660,7 @@
         </p:grpSpPr>
         <p:sp>
           <p:nvSpPr>
-            <p:cNvPr id="374" name="外わく"/>
+            <p:cNvPr id="373" name="外わく"/>
             <p:cNvSpPr/>
             <p:nvPr/>
           </p:nvSpPr>
@@ -16739,7 +16704,7 @@
         </p:sp>
         <p:cxnSp>
           <p:nvCxnSpPr>
-            <p:cNvPr id="375" name="マスの線 1"/>
+            <p:cNvPr id="374" name="マスの線 1"/>
             <p:cNvCxnSpPr/>
             <p:nvPr/>
           </p:nvCxnSpPr>
@@ -16775,7 +16740,7 @@
         </p:cxnSp>
         <p:cxnSp>
           <p:nvCxnSpPr>
-            <p:cNvPr id="376" name="マスの線 2"/>
+            <p:cNvPr id="375" name="マスの線 2"/>
             <p:cNvCxnSpPr/>
             <p:nvPr/>
           </p:nvCxnSpPr>
@@ -16811,7 +16776,7 @@
         </p:cxnSp>
         <p:cxnSp>
           <p:nvCxnSpPr>
-            <p:cNvPr id="377" name="マスの線 3"/>
+            <p:cNvPr id="376" name="マスの線 3"/>
             <p:cNvCxnSpPr/>
             <p:nvPr/>
           </p:nvCxnSpPr>
@@ -16847,7 +16812,7 @@
         </p:cxnSp>
         <p:cxnSp>
           <p:nvCxnSpPr>
-            <p:cNvPr id="378" name="マスの線 4"/>
+            <p:cNvPr id="377" name="マスの線 4"/>
             <p:cNvCxnSpPr/>
             <p:nvPr/>
           </p:nvCxnSpPr>
@@ -16883,7 +16848,7 @@
         </p:cxnSp>
         <p:cxnSp>
           <p:nvCxnSpPr>
-            <p:cNvPr id="379" name="マスの線 5"/>
+            <p:cNvPr id="378" name="マスの線 5"/>
             <p:cNvCxnSpPr/>
             <p:nvPr/>
           </p:nvCxnSpPr>
@@ -16919,7 +16884,7 @@
         </p:cxnSp>
         <p:cxnSp>
           <p:nvCxnSpPr>
-            <p:cNvPr id="380" name="マスの線 6"/>
+            <p:cNvPr id="379" name="マスの線 6"/>
             <p:cNvCxnSpPr/>
             <p:nvPr/>
           </p:nvCxnSpPr>
@@ -16955,7 +16920,7 @@
         </p:cxnSp>
         <p:cxnSp>
           <p:nvCxnSpPr>
-            <p:cNvPr id="381" name="マスの線 7"/>
+            <p:cNvPr id="380" name="マスの線 7"/>
             <p:cNvCxnSpPr/>
             <p:nvPr/>
           </p:nvCxnSpPr>
@@ -16991,7 +16956,7 @@
         </p:cxnSp>
         <p:cxnSp>
           <p:nvCxnSpPr>
-            <p:cNvPr id="382" name="マスの線 8"/>
+            <p:cNvPr id="381" name="マスの線 8"/>
             <p:cNvCxnSpPr/>
             <p:nvPr/>
           </p:nvCxnSpPr>
@@ -17027,7 +16992,7 @@
         </p:cxnSp>
         <p:cxnSp>
           <p:nvCxnSpPr>
-            <p:cNvPr id="383" name="マスの線 9"/>
+            <p:cNvPr id="382" name="マスの線 9"/>
             <p:cNvCxnSpPr/>
             <p:nvPr/>
           </p:nvCxnSpPr>
@@ -17063,7 +17028,7 @@
         </p:cxnSp>
         <p:cxnSp>
           <p:nvCxnSpPr>
-            <p:cNvPr id="384" name="マスの線 10"/>
+            <p:cNvPr id="383" name="マスの線 10"/>
             <p:cNvCxnSpPr/>
             <p:nvPr/>
           </p:nvCxnSpPr>
@@ -17099,7 +17064,7 @@
         </p:cxnSp>
         <p:cxnSp>
           <p:nvCxnSpPr>
-            <p:cNvPr id="385" name="マスの線 11"/>
+            <p:cNvPr id="384" name="マスの線 11"/>
             <p:cNvCxnSpPr/>
             <p:nvPr/>
           </p:nvCxnSpPr>
@@ -17135,7 +17100,7 @@
         </p:cxnSp>
         <p:cxnSp>
           <p:nvCxnSpPr>
-            <p:cNvPr id="386" name="マスの線 12"/>
+            <p:cNvPr id="385" name="マスの線 12"/>
             <p:cNvCxnSpPr/>
             <p:nvPr/>
           </p:nvCxnSpPr>
@@ -17171,7 +17136,7 @@
         </p:cxnSp>
         <p:cxnSp>
           <p:nvCxnSpPr>
-            <p:cNvPr id="387" name="マスの線 13"/>
+            <p:cNvPr id="386" name="マスの線 13"/>
             <p:cNvCxnSpPr/>
             <p:nvPr/>
           </p:nvCxnSpPr>
@@ -17207,7 +17172,7 @@
         </p:cxnSp>
         <p:cxnSp>
           <p:nvCxnSpPr>
-            <p:cNvPr id="388" name="マスの線 14"/>
+            <p:cNvPr id="387" name="マスの線 14"/>
             <p:cNvCxnSpPr/>
             <p:nvPr/>
           </p:nvCxnSpPr>
@@ -17243,7 +17208,7 @@
         </p:cxnSp>
         <p:cxnSp>
           <p:nvCxnSpPr>
-            <p:cNvPr id="389" name="マスの線 15"/>
+            <p:cNvPr id="388" name="マスの線 15"/>
             <p:cNvCxnSpPr/>
             <p:nvPr/>
           </p:nvCxnSpPr>
@@ -17279,7 +17244,7 @@
         </p:cxnSp>
         <p:cxnSp>
           <p:nvCxnSpPr>
-            <p:cNvPr id="390" name="マスの線 16"/>
+            <p:cNvPr id="389" name="マスの線 16"/>
             <p:cNvCxnSpPr/>
             <p:nvPr/>
           </p:nvCxnSpPr>
@@ -17315,7 +17280,7 @@
         </p:cxnSp>
         <p:cxnSp>
           <p:nvCxnSpPr>
-            <p:cNvPr id="391" name="マスの線 17"/>
+            <p:cNvPr id="390" name="マスの線 17"/>
             <p:cNvCxnSpPr/>
             <p:nvPr/>
           </p:nvCxnSpPr>
@@ -17351,7 +17316,7 @@
         </p:cxnSp>
         <p:cxnSp>
           <p:nvCxnSpPr>
-            <p:cNvPr id="392" name="マスの線 18"/>
+            <p:cNvPr id="391" name="マスの線 18"/>
             <p:cNvCxnSpPr/>
             <p:nvPr/>
           </p:nvCxnSpPr>
@@ -17387,7 +17352,7 @@
         </p:cxnSp>
         <p:cxnSp>
           <p:nvCxnSpPr>
-            <p:cNvPr id="393" name="マスの線 19"/>
+            <p:cNvPr id="392" name="マスの線 19"/>
             <p:cNvCxnSpPr/>
             <p:nvPr/>
           </p:nvCxnSpPr>
@@ -17423,7 +17388,7 @@
         </p:cxnSp>
         <p:cxnSp>
           <p:nvCxnSpPr>
-            <p:cNvPr id="394" name="マスの線 20"/>
+            <p:cNvPr id="393" name="マスの線 20"/>
             <p:cNvCxnSpPr/>
             <p:nvPr/>
           </p:nvCxnSpPr>
@@ -17459,7 +17424,7 @@
         </p:cxnSp>
         <p:cxnSp>
           <p:nvCxnSpPr>
-            <p:cNvPr id="395" name="マスの線 21"/>
+            <p:cNvPr id="394" name="マスの線 21"/>
             <p:cNvCxnSpPr/>
             <p:nvPr/>
           </p:nvCxnSpPr>
@@ -17496,7 +17461,7 @@
       </p:grpSp>
       <p:grpSp>
         <p:nvGrpSpPr>
-          <p:cNvPr id="396" name="18行目"/>
+          <p:cNvPr id="395" name="18行目"/>
           <p:cNvGrpSpPr/>
           <p:nvPr/>
         </p:nvGrpSpPr>
@@ -17510,7 +17475,7 @@
         </p:grpSpPr>
         <p:sp>
           <p:nvSpPr>
-            <p:cNvPr id="397" name="外わく"/>
+            <p:cNvPr id="396" name="外わく"/>
             <p:cNvSpPr/>
             <p:nvPr/>
           </p:nvSpPr>
@@ -17554,7 +17519,7 @@
         </p:sp>
         <p:cxnSp>
           <p:nvCxnSpPr>
-            <p:cNvPr id="398" name="マスの線 1"/>
+            <p:cNvPr id="397" name="マスの線 1"/>
             <p:cNvCxnSpPr/>
             <p:nvPr/>
           </p:nvCxnSpPr>
@@ -17590,7 +17555,7 @@
         </p:cxnSp>
         <p:cxnSp>
           <p:nvCxnSpPr>
-            <p:cNvPr id="399" name="マスの線 2"/>
+            <p:cNvPr id="398" name="マスの線 2"/>
             <p:cNvCxnSpPr/>
             <p:nvPr/>
           </p:nvCxnSpPr>
@@ -17626,7 +17591,7 @@
         </p:cxnSp>
         <p:cxnSp>
           <p:nvCxnSpPr>
-            <p:cNvPr id="400" name="マスの線 3"/>
+            <p:cNvPr id="399" name="マスの線 3"/>
             <p:cNvCxnSpPr/>
             <p:nvPr/>
           </p:nvCxnSpPr>
@@ -17662,7 +17627,7 @@
         </p:cxnSp>
         <p:cxnSp>
           <p:nvCxnSpPr>
-            <p:cNvPr id="401" name="マスの線 4"/>
+            <p:cNvPr id="400" name="マスの線 4"/>
             <p:cNvCxnSpPr/>
             <p:nvPr/>
           </p:nvCxnSpPr>
@@ -17698,7 +17663,7 @@
         </p:cxnSp>
         <p:cxnSp>
           <p:nvCxnSpPr>
-            <p:cNvPr id="402" name="マスの線 5"/>
+            <p:cNvPr id="401" name="マスの線 5"/>
             <p:cNvCxnSpPr/>
             <p:nvPr/>
           </p:nvCxnSpPr>
@@ -17734,7 +17699,7 @@
         </p:cxnSp>
         <p:cxnSp>
           <p:nvCxnSpPr>
-            <p:cNvPr id="403" name="マスの線 6"/>
+            <p:cNvPr id="402" name="マスの線 6"/>
             <p:cNvCxnSpPr/>
             <p:nvPr/>
           </p:nvCxnSpPr>
@@ -17770,7 +17735,7 @@
         </p:cxnSp>
         <p:cxnSp>
           <p:nvCxnSpPr>
-            <p:cNvPr id="404" name="マスの線 7"/>
+            <p:cNvPr id="403" name="マスの線 7"/>
             <p:cNvCxnSpPr/>
             <p:nvPr/>
           </p:nvCxnSpPr>
@@ -17806,7 +17771,7 @@
         </p:cxnSp>
         <p:cxnSp>
           <p:nvCxnSpPr>
-            <p:cNvPr id="405" name="マスの線 8"/>
+            <p:cNvPr id="404" name="マスの線 8"/>
             <p:cNvCxnSpPr/>
             <p:nvPr/>
           </p:nvCxnSpPr>
@@ -17842,7 +17807,7 @@
         </p:cxnSp>
         <p:cxnSp>
           <p:nvCxnSpPr>
-            <p:cNvPr id="406" name="マスの線 9"/>
+            <p:cNvPr id="405" name="マスの線 9"/>
             <p:cNvCxnSpPr/>
             <p:nvPr/>
           </p:nvCxnSpPr>
@@ -17878,7 +17843,7 @@
         </p:cxnSp>
         <p:cxnSp>
           <p:nvCxnSpPr>
-            <p:cNvPr id="407" name="マスの線 10"/>
+            <p:cNvPr id="406" name="マスの線 10"/>
             <p:cNvCxnSpPr/>
             <p:nvPr/>
           </p:nvCxnSpPr>
@@ -17914,7 +17879,7 @@
         </p:cxnSp>
         <p:cxnSp>
           <p:nvCxnSpPr>
-            <p:cNvPr id="408" name="マスの線 11"/>
+            <p:cNvPr id="407" name="マスの線 11"/>
             <p:cNvCxnSpPr/>
             <p:nvPr/>
           </p:nvCxnSpPr>
@@ -17950,7 +17915,7 @@
         </p:cxnSp>
         <p:cxnSp>
           <p:nvCxnSpPr>
-            <p:cNvPr id="409" name="マスの線 12"/>
+            <p:cNvPr id="408" name="マスの線 12"/>
             <p:cNvCxnSpPr/>
             <p:nvPr/>
           </p:nvCxnSpPr>
@@ -17986,7 +17951,7 @@
         </p:cxnSp>
         <p:cxnSp>
           <p:nvCxnSpPr>
-            <p:cNvPr id="410" name="マスの線 13"/>
+            <p:cNvPr id="409" name="マスの線 13"/>
             <p:cNvCxnSpPr/>
             <p:nvPr/>
           </p:nvCxnSpPr>
@@ -18022,7 +17987,7 @@
         </p:cxnSp>
         <p:cxnSp>
           <p:nvCxnSpPr>
-            <p:cNvPr id="411" name="マスの線 14"/>
+            <p:cNvPr id="410" name="マスの線 14"/>
             <p:cNvCxnSpPr/>
             <p:nvPr/>
           </p:nvCxnSpPr>
@@ -18058,7 +18023,7 @@
         </p:cxnSp>
         <p:cxnSp>
           <p:nvCxnSpPr>
-            <p:cNvPr id="412" name="マスの線 15"/>
+            <p:cNvPr id="411" name="マスの線 15"/>
             <p:cNvCxnSpPr/>
             <p:nvPr/>
           </p:nvCxnSpPr>
@@ -18094,7 +18059,7 @@
         </p:cxnSp>
         <p:cxnSp>
           <p:nvCxnSpPr>
-            <p:cNvPr id="413" name="マスの線 16"/>
+            <p:cNvPr id="412" name="マスの線 16"/>
             <p:cNvCxnSpPr/>
             <p:nvPr/>
           </p:nvCxnSpPr>
@@ -18130,7 +18095,7 @@
         </p:cxnSp>
         <p:cxnSp>
           <p:nvCxnSpPr>
-            <p:cNvPr id="414" name="マスの線 17"/>
+            <p:cNvPr id="413" name="マスの線 17"/>
             <p:cNvCxnSpPr/>
             <p:nvPr/>
           </p:nvCxnSpPr>
@@ -18166,7 +18131,7 @@
         </p:cxnSp>
         <p:cxnSp>
           <p:nvCxnSpPr>
-            <p:cNvPr id="415" name="マスの線 18"/>
+            <p:cNvPr id="414" name="マスの線 18"/>
             <p:cNvCxnSpPr/>
             <p:nvPr/>
           </p:nvCxnSpPr>
@@ -18202,7 +18167,7 @@
         </p:cxnSp>
         <p:cxnSp>
           <p:nvCxnSpPr>
-            <p:cNvPr id="416" name="マスの線 19"/>
+            <p:cNvPr id="415" name="マスの線 19"/>
             <p:cNvCxnSpPr/>
             <p:nvPr/>
           </p:nvCxnSpPr>
@@ -18238,7 +18203,7 @@
         </p:cxnSp>
         <p:cxnSp>
           <p:nvCxnSpPr>
-            <p:cNvPr id="417" name="マスの線 20"/>
+            <p:cNvPr id="416" name="マスの線 20"/>
             <p:cNvCxnSpPr/>
             <p:nvPr/>
           </p:nvCxnSpPr>
@@ -18274,7 +18239,7 @@
         </p:cxnSp>
         <p:cxnSp>
           <p:nvCxnSpPr>
-            <p:cNvPr id="418" name="マスの線 21"/>
+            <p:cNvPr id="417" name="マスの線 21"/>
             <p:cNvCxnSpPr/>
             <p:nvPr/>
           </p:nvCxnSpPr>
@@ -18311,7 +18276,7 @@
       </p:grpSp>
       <p:grpSp>
         <p:nvGrpSpPr>
-          <p:cNvPr id="419" name="19行目"/>
+          <p:cNvPr id="418" name="19行目"/>
           <p:cNvGrpSpPr/>
           <p:nvPr/>
         </p:nvGrpSpPr>
@@ -18325,7 +18290,7 @@
         </p:grpSpPr>
         <p:sp>
           <p:nvSpPr>
-            <p:cNvPr id="420" name="外わく"/>
+            <p:cNvPr id="419" name="外わく"/>
             <p:cNvSpPr/>
             <p:nvPr/>
           </p:nvSpPr>
@@ -18369,7 +18334,7 @@
         </p:sp>
         <p:cxnSp>
           <p:nvCxnSpPr>
-            <p:cNvPr id="421" name="マスの線 1"/>
+            <p:cNvPr id="420" name="マスの線 1"/>
             <p:cNvCxnSpPr/>
             <p:nvPr/>
           </p:nvCxnSpPr>
@@ -18405,7 +18370,7 @@
         </p:cxnSp>
         <p:cxnSp>
           <p:nvCxnSpPr>
-            <p:cNvPr id="422" name="マスの線 2"/>
+            <p:cNvPr id="421" name="マスの線 2"/>
             <p:cNvCxnSpPr/>
             <p:nvPr/>
           </p:nvCxnSpPr>
@@ -18441,7 +18406,7 @@
         </p:cxnSp>
         <p:cxnSp>
           <p:nvCxnSpPr>
-            <p:cNvPr id="423" name="マスの線 3"/>
+            <p:cNvPr id="422" name="マスの線 3"/>
             <p:cNvCxnSpPr/>
             <p:nvPr/>
           </p:nvCxnSpPr>
@@ -18477,7 +18442,7 @@
         </p:cxnSp>
         <p:cxnSp>
           <p:nvCxnSpPr>
-            <p:cNvPr id="424" name="マスの線 4"/>
+            <p:cNvPr id="423" name="マスの線 4"/>
             <p:cNvCxnSpPr/>
             <p:nvPr/>
           </p:nvCxnSpPr>
@@ -18513,7 +18478,7 @@
         </p:cxnSp>
         <p:cxnSp>
           <p:nvCxnSpPr>
-            <p:cNvPr id="425" name="マスの線 5"/>
+            <p:cNvPr id="424" name="マスの線 5"/>
             <p:cNvCxnSpPr/>
             <p:nvPr/>
           </p:nvCxnSpPr>
@@ -18549,7 +18514,7 @@
         </p:cxnSp>
         <p:cxnSp>
           <p:nvCxnSpPr>
-            <p:cNvPr id="426" name="マスの線 6"/>
+            <p:cNvPr id="425" name="マスの線 6"/>
             <p:cNvCxnSpPr/>
             <p:nvPr/>
           </p:nvCxnSpPr>
@@ -18585,7 +18550,7 @@
         </p:cxnSp>
         <p:cxnSp>
           <p:nvCxnSpPr>
-            <p:cNvPr id="427" name="マスの線 7"/>
+            <p:cNvPr id="426" name="マスの線 7"/>
             <p:cNvCxnSpPr/>
             <p:nvPr/>
           </p:nvCxnSpPr>
@@ -18621,7 +18586,7 @@
         </p:cxnSp>
         <p:cxnSp>
           <p:nvCxnSpPr>
-            <p:cNvPr id="428" name="マスの線 8"/>
+            <p:cNvPr id="427" name="マスの線 8"/>
             <p:cNvCxnSpPr/>
             <p:nvPr/>
           </p:nvCxnSpPr>
@@ -18657,7 +18622,7 @@
         </p:cxnSp>
         <p:cxnSp>
           <p:nvCxnSpPr>
-            <p:cNvPr id="429" name="マスの線 9"/>
+            <p:cNvPr id="428" name="マスの線 9"/>
             <p:cNvCxnSpPr/>
             <p:nvPr/>
           </p:nvCxnSpPr>
@@ -18693,7 +18658,7 @@
         </p:cxnSp>
         <p:cxnSp>
           <p:nvCxnSpPr>
-            <p:cNvPr id="430" name="マスの線 10"/>
+            <p:cNvPr id="429" name="マスの線 10"/>
             <p:cNvCxnSpPr/>
             <p:nvPr/>
           </p:nvCxnSpPr>
@@ -18729,7 +18694,7 @@
         </p:cxnSp>
         <p:cxnSp>
           <p:nvCxnSpPr>
-            <p:cNvPr id="431" name="マスの線 11"/>
+            <p:cNvPr id="430" name="マスの線 11"/>
             <p:cNvCxnSpPr/>
             <p:nvPr/>
           </p:nvCxnSpPr>
@@ -18765,7 +18730,7 @@
         </p:cxnSp>
         <p:cxnSp>
           <p:nvCxnSpPr>
-            <p:cNvPr id="432" name="マスの線 12"/>
+            <p:cNvPr id="431" name="マスの線 12"/>
             <p:cNvCxnSpPr/>
             <p:nvPr/>
           </p:nvCxnSpPr>
@@ -18801,7 +18766,7 @@
         </p:cxnSp>
         <p:cxnSp>
           <p:nvCxnSpPr>
-            <p:cNvPr id="433" name="マスの線 13"/>
+            <p:cNvPr id="432" name="マスの線 13"/>
             <p:cNvCxnSpPr/>
             <p:nvPr/>
           </p:nvCxnSpPr>
@@ -18837,7 +18802,7 @@
         </p:cxnSp>
         <p:cxnSp>
           <p:nvCxnSpPr>
-            <p:cNvPr id="434" name="マスの線 14"/>
+            <p:cNvPr id="433" name="マスの線 14"/>
             <p:cNvCxnSpPr/>
             <p:nvPr/>
           </p:nvCxnSpPr>
@@ -18873,7 +18838,7 @@
         </p:cxnSp>
         <p:cxnSp>
           <p:nvCxnSpPr>
-            <p:cNvPr id="435" name="マスの線 15"/>
+            <p:cNvPr id="434" name="マスの線 15"/>
             <p:cNvCxnSpPr/>
             <p:nvPr/>
           </p:nvCxnSpPr>
@@ -18909,7 +18874,7 @@
         </p:cxnSp>
         <p:cxnSp>
           <p:nvCxnSpPr>
-            <p:cNvPr id="436" name="マスの線 16"/>
+            <p:cNvPr id="435" name="マスの線 16"/>
             <p:cNvCxnSpPr/>
             <p:nvPr/>
           </p:nvCxnSpPr>
@@ -18945,7 +18910,7 @@
         </p:cxnSp>
         <p:cxnSp>
           <p:nvCxnSpPr>
-            <p:cNvPr id="437" name="マスの線 17"/>
+            <p:cNvPr id="436" name="マスの線 17"/>
             <p:cNvCxnSpPr/>
             <p:nvPr/>
           </p:nvCxnSpPr>
@@ -18981,7 +18946,7 @@
         </p:cxnSp>
         <p:cxnSp>
           <p:nvCxnSpPr>
-            <p:cNvPr id="438" name="マスの線 18"/>
+            <p:cNvPr id="437" name="マスの線 18"/>
             <p:cNvCxnSpPr/>
             <p:nvPr/>
           </p:nvCxnSpPr>
@@ -19017,7 +18982,7 @@
         </p:cxnSp>
         <p:cxnSp>
           <p:nvCxnSpPr>
-            <p:cNvPr id="439" name="マスの線 19"/>
+            <p:cNvPr id="438" name="マスの線 19"/>
             <p:cNvCxnSpPr/>
             <p:nvPr/>
           </p:nvCxnSpPr>
@@ -19053,7 +19018,7 @@
         </p:cxnSp>
         <p:cxnSp>
           <p:nvCxnSpPr>
-            <p:cNvPr id="440" name="マスの線 20"/>
+            <p:cNvPr id="439" name="マスの線 20"/>
             <p:cNvCxnSpPr/>
             <p:nvPr/>
           </p:nvCxnSpPr>
@@ -19089,7 +19054,7 @@
         </p:cxnSp>
         <p:cxnSp>
           <p:nvCxnSpPr>
-            <p:cNvPr id="441" name="マスの線 21"/>
+            <p:cNvPr id="440" name="マスの線 21"/>
             <p:cNvCxnSpPr/>
             <p:nvPr/>
           </p:nvCxnSpPr>
@@ -19126,7 +19091,7 @@
       </p:grpSp>
       <p:grpSp>
         <p:nvGrpSpPr>
-          <p:cNvPr id="442" name="20行目"/>
+          <p:cNvPr id="441" name="20行目"/>
           <p:cNvGrpSpPr/>
           <p:nvPr/>
         </p:nvGrpSpPr>
@@ -19140,7 +19105,7 @@
         </p:grpSpPr>
         <p:sp>
           <p:nvSpPr>
-            <p:cNvPr id="443" name="外わく"/>
+            <p:cNvPr id="442" name="外わく"/>
             <p:cNvSpPr/>
             <p:nvPr/>
           </p:nvSpPr>
@@ -19184,7 +19149,7 @@
         </p:sp>
         <p:cxnSp>
           <p:nvCxnSpPr>
-            <p:cNvPr id="444" name="マスの線 1"/>
+            <p:cNvPr id="443" name="マスの線 1"/>
             <p:cNvCxnSpPr/>
             <p:nvPr/>
           </p:nvCxnSpPr>
@@ -19220,7 +19185,7 @@
         </p:cxnSp>
         <p:cxnSp>
           <p:nvCxnSpPr>
-            <p:cNvPr id="445" name="マスの線 2"/>
+            <p:cNvPr id="444" name="マスの線 2"/>
             <p:cNvCxnSpPr/>
             <p:nvPr/>
           </p:nvCxnSpPr>
@@ -19256,7 +19221,7 @@
         </p:cxnSp>
         <p:cxnSp>
           <p:nvCxnSpPr>
-            <p:cNvPr id="446" name="マスの線 3"/>
+            <p:cNvPr id="445" name="マスの線 3"/>
             <p:cNvCxnSpPr/>
             <p:nvPr/>
           </p:nvCxnSpPr>
@@ -19292,7 +19257,7 @@
         </p:cxnSp>
         <p:cxnSp>
           <p:nvCxnSpPr>
-            <p:cNvPr id="447" name="マスの線 4"/>
+            <p:cNvPr id="446" name="マスの線 4"/>
             <p:cNvCxnSpPr/>
             <p:nvPr/>
           </p:nvCxnSpPr>
@@ -19328,7 +19293,7 @@
         </p:cxnSp>
         <p:cxnSp>
           <p:nvCxnSpPr>
-            <p:cNvPr id="448" name="マスの線 5"/>
+            <p:cNvPr id="447" name="マスの線 5"/>
             <p:cNvCxnSpPr/>
             <p:nvPr/>
           </p:nvCxnSpPr>
@@ -19364,7 +19329,7 @@
         </p:cxnSp>
         <p:cxnSp>
           <p:nvCxnSpPr>
-            <p:cNvPr id="449" name="マスの線 6"/>
+            <p:cNvPr id="448" name="マスの線 6"/>
             <p:cNvCxnSpPr/>
             <p:nvPr/>
           </p:nvCxnSpPr>
@@ -19400,7 +19365,7 @@
         </p:cxnSp>
         <p:cxnSp>
           <p:nvCxnSpPr>
-            <p:cNvPr id="450" name="マスの線 7"/>
+            <p:cNvPr id="449" name="マスの線 7"/>
             <p:cNvCxnSpPr/>
             <p:nvPr/>
           </p:nvCxnSpPr>
@@ -19436,7 +19401,7 @@
         </p:cxnSp>
         <p:cxnSp>
           <p:nvCxnSpPr>
-            <p:cNvPr id="451" name="マスの線 8"/>
+            <p:cNvPr id="450" name="マスの線 8"/>
             <p:cNvCxnSpPr/>
             <p:nvPr/>
           </p:nvCxnSpPr>
@@ -19472,7 +19437,7 @@
         </p:cxnSp>
         <p:cxnSp>
           <p:nvCxnSpPr>
-            <p:cNvPr id="452" name="マスの線 9"/>
+            <p:cNvPr id="451" name="マスの線 9"/>
             <p:cNvCxnSpPr/>
             <p:nvPr/>
           </p:nvCxnSpPr>
@@ -19508,7 +19473,7 @@
         </p:cxnSp>
         <p:cxnSp>
           <p:nvCxnSpPr>
-            <p:cNvPr id="453" name="マスの線 10"/>
+            <p:cNvPr id="452" name="マスの線 10"/>
             <p:cNvCxnSpPr/>
             <p:nvPr/>
           </p:nvCxnSpPr>
@@ -19544,7 +19509,7 @@
         </p:cxnSp>
         <p:cxnSp>
           <p:nvCxnSpPr>
-            <p:cNvPr id="454" name="マスの線 11"/>
+            <p:cNvPr id="453" name="マスの線 11"/>
             <p:cNvCxnSpPr/>
             <p:nvPr/>
           </p:nvCxnSpPr>
@@ -19580,7 +19545,7 @@
         </p:cxnSp>
         <p:cxnSp>
           <p:nvCxnSpPr>
-            <p:cNvPr id="455" name="マスの線 12"/>
+            <p:cNvPr id="454" name="マスの線 12"/>
             <p:cNvCxnSpPr/>
             <p:nvPr/>
           </p:nvCxnSpPr>
@@ -19616,7 +19581,7 @@
         </p:cxnSp>
         <p:cxnSp>
           <p:nvCxnSpPr>
-            <p:cNvPr id="456" name="マスの線 13"/>
+            <p:cNvPr id="455" name="マスの線 13"/>
             <p:cNvCxnSpPr/>
             <p:nvPr/>
           </p:nvCxnSpPr>
@@ -19652,7 +19617,7 @@
         </p:cxnSp>
         <p:cxnSp>
           <p:nvCxnSpPr>
-            <p:cNvPr id="457" name="マスの線 14"/>
+            <p:cNvPr id="456" name="マスの線 14"/>
             <p:cNvCxnSpPr/>
             <p:nvPr/>
           </p:nvCxnSpPr>
@@ -19688,7 +19653,7 @@
         </p:cxnSp>
         <p:cxnSp>
           <p:nvCxnSpPr>
-            <p:cNvPr id="458" name="マスの線 15"/>
+            <p:cNvPr id="457" name="マスの線 15"/>
             <p:cNvCxnSpPr/>
             <p:nvPr/>
           </p:nvCxnSpPr>
@@ -19724,7 +19689,7 @@
         </p:cxnSp>
         <p:cxnSp>
           <p:nvCxnSpPr>
-            <p:cNvPr id="459" name="マスの線 16"/>
+            <p:cNvPr id="458" name="マスの線 16"/>
             <p:cNvCxnSpPr/>
             <p:nvPr/>
           </p:nvCxnSpPr>
@@ -19760,7 +19725,7 @@
         </p:cxnSp>
         <p:cxnSp>
           <p:nvCxnSpPr>
-            <p:cNvPr id="460" name="マスの線 17"/>
+            <p:cNvPr id="459" name="マスの線 17"/>
             <p:cNvCxnSpPr/>
             <p:nvPr/>
           </p:nvCxnSpPr>
@@ -19796,7 +19761,7 @@
         </p:cxnSp>
         <p:cxnSp>
           <p:nvCxnSpPr>
-            <p:cNvPr id="461" name="マスの線 18"/>
+            <p:cNvPr id="460" name="マスの線 18"/>
             <p:cNvCxnSpPr/>
             <p:nvPr/>
           </p:nvCxnSpPr>
@@ -19832,7 +19797,7 @@
         </p:cxnSp>
         <p:cxnSp>
           <p:nvCxnSpPr>
-            <p:cNvPr id="462" name="マスの線 19"/>
+            <p:cNvPr id="461" name="マスの線 19"/>
             <p:cNvCxnSpPr/>
             <p:nvPr/>
           </p:nvCxnSpPr>
@@ -19868,7 +19833,7 @@
         </p:cxnSp>
         <p:cxnSp>
           <p:nvCxnSpPr>
-            <p:cNvPr id="463" name="マスの線 20"/>
+            <p:cNvPr id="462" name="マスの線 20"/>
             <p:cNvCxnSpPr/>
             <p:nvPr/>
           </p:nvCxnSpPr>
@@ -19904,7 +19869,7 @@
         </p:cxnSp>
         <p:cxnSp>
           <p:nvCxnSpPr>
-            <p:cNvPr id="464" name="マスの線 21"/>
+            <p:cNvPr id="463" name="マスの線 21"/>
             <p:cNvCxnSpPr/>
             <p:nvPr/>
           </p:nvCxnSpPr>
@@ -19941,7 +19906,7 @@
       </p:grpSp>
       <p:grpSp>
         <p:nvGrpSpPr>
-          <p:cNvPr id="465" name="21行目"/>
+          <p:cNvPr id="464" name="21行目"/>
           <p:cNvGrpSpPr/>
           <p:nvPr/>
         </p:nvGrpSpPr>
@@ -19955,7 +19920,7 @@
         </p:grpSpPr>
         <p:sp>
           <p:nvSpPr>
-            <p:cNvPr id="466" name="外わく"/>
+            <p:cNvPr id="465" name="外わく"/>
             <p:cNvSpPr/>
             <p:nvPr/>
           </p:nvSpPr>
@@ -19999,7 +19964,7 @@
         </p:sp>
         <p:cxnSp>
           <p:nvCxnSpPr>
-            <p:cNvPr id="467" name="マスの線 1"/>
+            <p:cNvPr id="466" name="マスの線 1"/>
             <p:cNvCxnSpPr/>
             <p:nvPr/>
           </p:nvCxnSpPr>
@@ -20035,7 +20000,7 @@
         </p:cxnSp>
         <p:cxnSp>
           <p:nvCxnSpPr>
-            <p:cNvPr id="468" name="マスの線 2"/>
+            <p:cNvPr id="467" name="マスの線 2"/>
             <p:cNvCxnSpPr/>
             <p:nvPr/>
           </p:nvCxnSpPr>
@@ -20071,7 +20036,7 @@
         </p:cxnSp>
         <p:cxnSp>
           <p:nvCxnSpPr>
-            <p:cNvPr id="469" name="マスの線 3"/>
+            <p:cNvPr id="468" name="マスの線 3"/>
             <p:cNvCxnSpPr/>
             <p:nvPr/>
           </p:nvCxnSpPr>
@@ -20107,7 +20072,7 @@
         </p:cxnSp>
         <p:cxnSp>
           <p:nvCxnSpPr>
-            <p:cNvPr id="470" name="マスの線 4"/>
+            <p:cNvPr id="469" name="マスの線 4"/>
             <p:cNvCxnSpPr/>
             <p:nvPr/>
           </p:nvCxnSpPr>
@@ -20143,7 +20108,7 @@
         </p:cxnSp>
         <p:cxnSp>
           <p:nvCxnSpPr>
-            <p:cNvPr id="471" name="マスの線 5"/>
+            <p:cNvPr id="470" name="マスの線 5"/>
             <p:cNvCxnSpPr/>
             <p:nvPr/>
           </p:nvCxnSpPr>
@@ -20179,7 +20144,7 @@
         </p:cxnSp>
         <p:cxnSp>
           <p:nvCxnSpPr>
-            <p:cNvPr id="472" name="マスの線 6"/>
+            <p:cNvPr id="471" name="マスの線 6"/>
             <p:cNvCxnSpPr/>
             <p:nvPr/>
           </p:nvCxnSpPr>
@@ -20215,7 +20180,7 @@
         </p:cxnSp>
         <p:cxnSp>
           <p:nvCxnSpPr>
-            <p:cNvPr id="473" name="マスの線 7"/>
+            <p:cNvPr id="472" name="マスの線 7"/>
             <p:cNvCxnSpPr/>
             <p:nvPr/>
           </p:nvCxnSpPr>
@@ -20251,7 +20216,7 @@
         </p:cxnSp>
         <p:cxnSp>
           <p:nvCxnSpPr>
-            <p:cNvPr id="474" name="マスの線 8"/>
+            <p:cNvPr id="473" name="マスの線 8"/>
             <p:cNvCxnSpPr/>
             <p:nvPr/>
           </p:nvCxnSpPr>
@@ -20287,7 +20252,7 @@
         </p:cxnSp>
         <p:cxnSp>
           <p:nvCxnSpPr>
-            <p:cNvPr id="475" name="マスの線 9"/>
+            <p:cNvPr id="474" name="マスの線 9"/>
             <p:cNvCxnSpPr/>
             <p:nvPr/>
           </p:nvCxnSpPr>
@@ -20323,7 +20288,7 @@
         </p:cxnSp>
         <p:cxnSp>
           <p:nvCxnSpPr>
-            <p:cNvPr id="476" name="マスの線 10"/>
+            <p:cNvPr id="475" name="マスの線 10"/>
             <p:cNvCxnSpPr/>
             <p:nvPr/>
           </p:nvCxnSpPr>
@@ -20359,7 +20324,7 @@
         </p:cxnSp>
         <p:cxnSp>
           <p:nvCxnSpPr>
-            <p:cNvPr id="477" name="マスの線 11"/>
+            <p:cNvPr id="476" name="マスの線 11"/>
             <p:cNvCxnSpPr/>
             <p:nvPr/>
           </p:nvCxnSpPr>
@@ -20395,7 +20360,7 @@
         </p:cxnSp>
         <p:cxnSp>
           <p:nvCxnSpPr>
-            <p:cNvPr id="478" name="マスの線 12"/>
+            <p:cNvPr id="477" name="マスの線 12"/>
             <p:cNvCxnSpPr/>
             <p:nvPr/>
           </p:nvCxnSpPr>
@@ -20431,7 +20396,7 @@
         </p:cxnSp>
         <p:cxnSp>
           <p:nvCxnSpPr>
-            <p:cNvPr id="479" name="マスの線 13"/>
+            <p:cNvPr id="478" name="マスの線 13"/>
             <p:cNvCxnSpPr/>
             <p:nvPr/>
           </p:nvCxnSpPr>
@@ -20467,7 +20432,7 @@
         </p:cxnSp>
         <p:cxnSp>
           <p:nvCxnSpPr>
-            <p:cNvPr id="480" name="マスの線 14"/>
+            <p:cNvPr id="479" name="マスの線 14"/>
             <p:cNvCxnSpPr/>
             <p:nvPr/>
           </p:nvCxnSpPr>
@@ -20503,7 +20468,7 @@
         </p:cxnSp>
         <p:cxnSp>
           <p:nvCxnSpPr>
-            <p:cNvPr id="481" name="マスの線 15"/>
+            <p:cNvPr id="480" name="マスの線 15"/>
             <p:cNvCxnSpPr/>
             <p:nvPr/>
           </p:nvCxnSpPr>
@@ -20539,7 +20504,7 @@
         </p:cxnSp>
         <p:cxnSp>
           <p:nvCxnSpPr>
-            <p:cNvPr id="482" name="マスの線 16"/>
+            <p:cNvPr id="481" name="マスの線 16"/>
             <p:cNvCxnSpPr/>
             <p:nvPr/>
           </p:nvCxnSpPr>
@@ -20575,7 +20540,7 @@
         </p:cxnSp>
         <p:cxnSp>
           <p:nvCxnSpPr>
-            <p:cNvPr id="483" name="マスの線 17"/>
+            <p:cNvPr id="482" name="マスの線 17"/>
             <p:cNvCxnSpPr/>
             <p:nvPr/>
           </p:nvCxnSpPr>
@@ -20611,7 +20576,7 @@
         </p:cxnSp>
         <p:cxnSp>
           <p:nvCxnSpPr>
-            <p:cNvPr id="484" name="マスの線 18"/>
+            <p:cNvPr id="483" name="マスの線 18"/>
             <p:cNvCxnSpPr/>
             <p:nvPr/>
           </p:nvCxnSpPr>
@@ -20647,7 +20612,7 @@
         </p:cxnSp>
         <p:cxnSp>
           <p:nvCxnSpPr>
-            <p:cNvPr id="485" name="マスの線 19"/>
+            <p:cNvPr id="484" name="マスの線 19"/>
             <p:cNvCxnSpPr/>
             <p:nvPr/>
           </p:nvCxnSpPr>
@@ -20683,7 +20648,7 @@
         </p:cxnSp>
         <p:cxnSp>
           <p:nvCxnSpPr>
-            <p:cNvPr id="486" name="マスの線 20"/>
+            <p:cNvPr id="485" name="マスの線 20"/>
             <p:cNvCxnSpPr/>
             <p:nvPr/>
           </p:nvCxnSpPr>
@@ -20719,7 +20684,7 @@
         </p:cxnSp>
         <p:cxnSp>
           <p:nvCxnSpPr>
-            <p:cNvPr id="487" name="マスの線 21"/>
+            <p:cNvPr id="486" name="マスの線 21"/>
             <p:cNvCxnSpPr/>
             <p:nvPr/>
           </p:nvCxnSpPr>
@@ -20756,7 +20721,7 @@
       </p:grpSp>
       <p:pic>
         <p:nvPicPr>
-          <p:cNvPr id="488" name="さし絵（消してもかまいません）" descr="_tmp_ill.png"/>
+          <p:cNvPr id="487" name="さし絵（消してもかまいません）" descr="_tmp_ill.png"/>
           <p:cNvPicPr>
             <a:picLocks noChangeAspect="1"/>
           </p:cNvPicPr>
@@ -20780,7 +20745,7 @@
       </p:pic>
       <p:sp>
         <p:nvSpPr>
-          <p:cNvPr id="489" name="紙の説明（消してもかまいません）"/>
+          <p:cNvPr id="488" name="紙の説明（消してもかまいません）"/>
           <p:cNvSpPr txBox="1"/>
           <p:nvPr/>
         </p:nvSpPr>
@@ -20815,7 +20780,7 @@
       </p:sp>
       <p:sp>
         <p:nvSpPr>
-          <p:cNvPr id="490" name="クレジット"/>
+          <p:cNvPr id="489" name="クレジット"/>
           <p:cNvSpPr txBox="1"/>
           <p:nvPr/>
         </p:nvSpPr>
